--- a/IV Sem/SCM/Git Basics.pptx
+++ b/IV Sem/SCM/Git Basics.pptx
@@ -12,6 +12,14 @@
     <p:sldId id="260" r:id="rId6"/>
     <p:sldId id="261" r:id="rId7"/>
     <p:sldId id="262" r:id="rId8"/>
+    <p:sldId id="263" r:id="rId9"/>
+    <p:sldId id="264" r:id="rId10"/>
+    <p:sldId id="265" r:id="rId11"/>
+    <p:sldId id="266" r:id="rId12"/>
+    <p:sldId id="267" r:id="rId13"/>
+    <p:sldId id="268" r:id="rId14"/>
+    <p:sldId id="269" r:id="rId15"/>
+    <p:sldId id="270" r:id="rId16"/>
   </p:sldIdLst>
   <p:sldSz cx="12192000" cy="6858000"/>
   <p:notesSz cx="6858000" cy="9144000"/>
@@ -110,7 +118,146 @@
       </a:defRPr>
     </a:lvl9pPr>
   </p:defaultTextStyle>
+  <p:extLst>
+    <p:ext uri="{EFAFB233-063F-42B5-8137-9DF3F51BA10A}">
+      <p15:sldGuideLst xmlns:p15="http://schemas.microsoft.com/office/powerpoint/2012/main"/>
+    </p:ext>
+  </p:extLst>
 </p:presentation>
+</file>
+
+<file path=ppt/changesInfos/changesInfo1.xml><?xml version="1.0" encoding="utf-8"?>
+<pc:chgInfo xmlns:a="http://schemas.openxmlformats.org/drawingml/2006/main" xmlns:r="http://schemas.openxmlformats.org/officeDocument/2006/relationships" xmlns:ac="http://schemas.microsoft.com/office/drawing/2013/main/command" xmlns:pc="http://schemas.microsoft.com/office/powerpoint/2013/main/command">
+  <pc:docChgLst>
+    <pc:chgData name="Utkarsh Agarwal" userId="7a1216fa42ee05d0" providerId="LiveId" clId="{5A8ABE04-300D-46CD-9942-40B59078845C}"/>
+    <pc:docChg chg="addSld modSld">
+      <pc:chgData name="Utkarsh Agarwal" userId="7a1216fa42ee05d0" providerId="LiveId" clId="{5A8ABE04-300D-46CD-9942-40B59078845C}" dt="2026-01-22T18:10:48.968" v="33" actId="1076"/>
+      <pc:docMkLst>
+        <pc:docMk/>
+      </pc:docMkLst>
+      <pc:sldChg chg="addSp new mod">
+        <pc:chgData name="Utkarsh Agarwal" userId="7a1216fa42ee05d0" providerId="LiveId" clId="{5A8ABE04-300D-46CD-9942-40B59078845C}" dt="2026-01-22T17:53:47.230" v="1" actId="22"/>
+        <pc:sldMkLst>
+          <pc:docMk/>
+          <pc:sldMk cId="243591831" sldId="263"/>
+        </pc:sldMkLst>
+        <pc:picChg chg="add">
+          <ac:chgData name="Utkarsh Agarwal" userId="7a1216fa42ee05d0" providerId="LiveId" clId="{5A8ABE04-300D-46CD-9942-40B59078845C}" dt="2026-01-22T17:53:47.230" v="1" actId="22"/>
+          <ac:picMkLst>
+            <pc:docMk/>
+            <pc:sldMk cId="243591831" sldId="263"/>
+            <ac:picMk id="5" creationId="{B0F2B126-A5E2-990A-7443-740C83055A2A}"/>
+          </ac:picMkLst>
+        </pc:picChg>
+      </pc:sldChg>
+      <pc:sldChg chg="addSp modSp new mod">
+        <pc:chgData name="Utkarsh Agarwal" userId="7a1216fa42ee05d0" providerId="LiveId" clId="{5A8ABE04-300D-46CD-9942-40B59078845C}" dt="2026-01-22T17:54:50.280" v="5" actId="1076"/>
+        <pc:sldMkLst>
+          <pc:docMk/>
+          <pc:sldMk cId="1351986072" sldId="264"/>
+        </pc:sldMkLst>
+        <pc:picChg chg="add mod">
+          <ac:chgData name="Utkarsh Agarwal" userId="7a1216fa42ee05d0" providerId="LiveId" clId="{5A8ABE04-300D-46CD-9942-40B59078845C}" dt="2026-01-22T17:54:50.280" v="5" actId="1076"/>
+          <ac:picMkLst>
+            <pc:docMk/>
+            <pc:sldMk cId="1351986072" sldId="264"/>
+            <ac:picMk id="5" creationId="{3A12D3BA-D023-50ED-AD22-0C402796BC1C}"/>
+          </ac:picMkLst>
+        </pc:picChg>
+      </pc:sldChg>
+      <pc:sldChg chg="addSp modSp new mod">
+        <pc:chgData name="Utkarsh Agarwal" userId="7a1216fa42ee05d0" providerId="LiveId" clId="{5A8ABE04-300D-46CD-9942-40B59078845C}" dt="2026-01-22T18:02:53.470" v="9" actId="1076"/>
+        <pc:sldMkLst>
+          <pc:docMk/>
+          <pc:sldMk cId="4196342498" sldId="265"/>
+        </pc:sldMkLst>
+        <pc:picChg chg="add mod">
+          <ac:chgData name="Utkarsh Agarwal" userId="7a1216fa42ee05d0" providerId="LiveId" clId="{5A8ABE04-300D-46CD-9942-40B59078845C}" dt="2026-01-22T18:02:53.470" v="9" actId="1076"/>
+          <ac:picMkLst>
+            <pc:docMk/>
+            <pc:sldMk cId="4196342498" sldId="265"/>
+            <ac:picMk id="5" creationId="{1F78C17E-49DD-704A-6B59-AC3F48CBD3A4}"/>
+          </ac:picMkLst>
+        </pc:picChg>
+      </pc:sldChg>
+      <pc:sldChg chg="addSp modSp new mod">
+        <pc:chgData name="Utkarsh Agarwal" userId="7a1216fa42ee05d0" providerId="LiveId" clId="{5A8ABE04-300D-46CD-9942-40B59078845C}" dt="2026-01-22T18:03:13.434" v="13" actId="1076"/>
+        <pc:sldMkLst>
+          <pc:docMk/>
+          <pc:sldMk cId="3746935491" sldId="266"/>
+        </pc:sldMkLst>
+        <pc:picChg chg="add mod">
+          <ac:chgData name="Utkarsh Agarwal" userId="7a1216fa42ee05d0" providerId="LiveId" clId="{5A8ABE04-300D-46CD-9942-40B59078845C}" dt="2026-01-22T18:03:13.434" v="13" actId="1076"/>
+          <ac:picMkLst>
+            <pc:docMk/>
+            <pc:sldMk cId="3746935491" sldId="266"/>
+            <ac:picMk id="5" creationId="{45353D29-8A63-ECA1-781D-31FE6ACF3FB0}"/>
+          </ac:picMkLst>
+        </pc:picChg>
+      </pc:sldChg>
+      <pc:sldChg chg="addSp modSp new mod">
+        <pc:chgData name="Utkarsh Agarwal" userId="7a1216fa42ee05d0" providerId="LiveId" clId="{5A8ABE04-300D-46CD-9942-40B59078845C}" dt="2026-01-22T18:03:59.884" v="17" actId="1076"/>
+        <pc:sldMkLst>
+          <pc:docMk/>
+          <pc:sldMk cId="2511080234" sldId="267"/>
+        </pc:sldMkLst>
+        <pc:picChg chg="add mod">
+          <ac:chgData name="Utkarsh Agarwal" userId="7a1216fa42ee05d0" providerId="LiveId" clId="{5A8ABE04-300D-46CD-9942-40B59078845C}" dt="2026-01-22T18:03:59.884" v="17" actId="1076"/>
+          <ac:picMkLst>
+            <pc:docMk/>
+            <pc:sldMk cId="2511080234" sldId="267"/>
+            <ac:picMk id="5" creationId="{A98AF5B2-EEB4-64BE-1AAF-4DF8F789AE90}"/>
+          </ac:picMkLst>
+        </pc:picChg>
+      </pc:sldChg>
+      <pc:sldChg chg="addSp modSp new mod">
+        <pc:chgData name="Utkarsh Agarwal" userId="7a1216fa42ee05d0" providerId="LiveId" clId="{5A8ABE04-300D-46CD-9942-40B59078845C}" dt="2026-01-22T18:07:42.589" v="21" actId="1076"/>
+        <pc:sldMkLst>
+          <pc:docMk/>
+          <pc:sldMk cId="3063373348" sldId="268"/>
+        </pc:sldMkLst>
+        <pc:picChg chg="add mod">
+          <ac:chgData name="Utkarsh Agarwal" userId="7a1216fa42ee05d0" providerId="LiveId" clId="{5A8ABE04-300D-46CD-9942-40B59078845C}" dt="2026-01-22T18:07:42.589" v="21" actId="1076"/>
+          <ac:picMkLst>
+            <pc:docMk/>
+            <pc:sldMk cId="3063373348" sldId="268"/>
+            <ac:picMk id="5" creationId="{B202F149-EEF0-53A5-BF9A-F661BDE246BD}"/>
+          </ac:picMkLst>
+        </pc:picChg>
+      </pc:sldChg>
+      <pc:sldChg chg="addSp modSp new mod">
+        <pc:chgData name="Utkarsh Agarwal" userId="7a1216fa42ee05d0" providerId="LiveId" clId="{5A8ABE04-300D-46CD-9942-40B59078845C}" dt="2026-01-22T18:09:51.699" v="28" actId="1076"/>
+        <pc:sldMkLst>
+          <pc:docMk/>
+          <pc:sldMk cId="3463945465" sldId="269"/>
+        </pc:sldMkLst>
+        <pc:picChg chg="add mod">
+          <ac:chgData name="Utkarsh Agarwal" userId="7a1216fa42ee05d0" providerId="LiveId" clId="{5A8ABE04-300D-46CD-9942-40B59078845C}" dt="2026-01-22T18:09:51.699" v="28" actId="1076"/>
+          <ac:picMkLst>
+            <pc:docMk/>
+            <pc:sldMk cId="3463945465" sldId="269"/>
+            <ac:picMk id="5" creationId="{538C6867-832F-7B34-635B-052BFB7A3FC2}"/>
+          </ac:picMkLst>
+        </pc:picChg>
+      </pc:sldChg>
+      <pc:sldChg chg="addSp modSp new mod">
+        <pc:chgData name="Utkarsh Agarwal" userId="7a1216fa42ee05d0" providerId="LiveId" clId="{5A8ABE04-300D-46CD-9942-40B59078845C}" dt="2026-01-22T18:10:48.968" v="33" actId="1076"/>
+        <pc:sldMkLst>
+          <pc:docMk/>
+          <pc:sldMk cId="4023448103" sldId="270"/>
+        </pc:sldMkLst>
+        <pc:picChg chg="add mod">
+          <ac:chgData name="Utkarsh Agarwal" userId="7a1216fa42ee05d0" providerId="LiveId" clId="{5A8ABE04-300D-46CD-9942-40B59078845C}" dt="2026-01-22T18:10:48.968" v="33" actId="1076"/>
+          <ac:picMkLst>
+            <pc:docMk/>
+            <pc:sldMk cId="4023448103" sldId="270"/>
+            <ac:picMk id="5" creationId="{66E1F6D4-2C2B-13B2-6CE6-C0E41FC484DC}"/>
+          </ac:picMkLst>
+        </pc:picChg>
+      </pc:sldChg>
+    </pc:docChg>
+  </pc:docChgLst>
+</pc:chgInfo>
 </file>
 
 <file path=ppt/slideLayouts/slideLayout1.xml><?xml version="1.0" encoding="utf-8"?>
@@ -262,7 +409,7 @@
           <a:p>
             <a:fld id="{80E1994F-3A96-4BFC-9935-A0F2A58A4CCE}" type="datetimeFigureOut">
               <a:rPr lang="en-IN" smtClean="0"/>
-              <a:t>21-01-2026</a:t>
+              <a:t>22-01-2026</a:t>
             </a:fld>
             <a:endParaRPr lang="en-IN"/>
           </a:p>
@@ -462,7 +609,7 @@
           <a:p>
             <a:fld id="{80E1994F-3A96-4BFC-9935-A0F2A58A4CCE}" type="datetimeFigureOut">
               <a:rPr lang="en-IN" smtClean="0"/>
-              <a:t>21-01-2026</a:t>
+              <a:t>22-01-2026</a:t>
             </a:fld>
             <a:endParaRPr lang="en-IN"/>
           </a:p>
@@ -672,7 +819,7 @@
           <a:p>
             <a:fld id="{80E1994F-3A96-4BFC-9935-A0F2A58A4CCE}" type="datetimeFigureOut">
               <a:rPr lang="en-IN" smtClean="0"/>
-              <a:t>21-01-2026</a:t>
+              <a:t>22-01-2026</a:t>
             </a:fld>
             <a:endParaRPr lang="en-IN"/>
           </a:p>
@@ -872,7 +1019,7 @@
           <a:p>
             <a:fld id="{80E1994F-3A96-4BFC-9935-A0F2A58A4CCE}" type="datetimeFigureOut">
               <a:rPr lang="en-IN" smtClean="0"/>
-              <a:t>21-01-2026</a:t>
+              <a:t>22-01-2026</a:t>
             </a:fld>
             <a:endParaRPr lang="en-IN"/>
           </a:p>
@@ -1148,7 +1295,7 @@
           <a:p>
             <a:fld id="{80E1994F-3A96-4BFC-9935-A0F2A58A4CCE}" type="datetimeFigureOut">
               <a:rPr lang="en-IN" smtClean="0"/>
-              <a:t>21-01-2026</a:t>
+              <a:t>22-01-2026</a:t>
             </a:fld>
             <a:endParaRPr lang="en-IN"/>
           </a:p>
@@ -1416,7 +1563,7 @@
           <a:p>
             <a:fld id="{80E1994F-3A96-4BFC-9935-A0F2A58A4CCE}" type="datetimeFigureOut">
               <a:rPr lang="en-IN" smtClean="0"/>
-              <a:t>21-01-2026</a:t>
+              <a:t>22-01-2026</a:t>
             </a:fld>
             <a:endParaRPr lang="en-IN"/>
           </a:p>
@@ -1831,7 +1978,7 @@
           <a:p>
             <a:fld id="{80E1994F-3A96-4BFC-9935-A0F2A58A4CCE}" type="datetimeFigureOut">
               <a:rPr lang="en-IN" smtClean="0"/>
-              <a:t>21-01-2026</a:t>
+              <a:t>22-01-2026</a:t>
             </a:fld>
             <a:endParaRPr lang="en-IN"/>
           </a:p>
@@ -1973,7 +2120,7 @@
           <a:p>
             <a:fld id="{80E1994F-3A96-4BFC-9935-A0F2A58A4CCE}" type="datetimeFigureOut">
               <a:rPr lang="en-IN" smtClean="0"/>
-              <a:t>21-01-2026</a:t>
+              <a:t>22-01-2026</a:t>
             </a:fld>
             <a:endParaRPr lang="en-IN"/>
           </a:p>
@@ -2086,7 +2233,7 @@
           <a:p>
             <a:fld id="{80E1994F-3A96-4BFC-9935-A0F2A58A4CCE}" type="datetimeFigureOut">
               <a:rPr lang="en-IN" smtClean="0"/>
-              <a:t>21-01-2026</a:t>
+              <a:t>22-01-2026</a:t>
             </a:fld>
             <a:endParaRPr lang="en-IN"/>
           </a:p>
@@ -2399,7 +2546,7 @@
           <a:p>
             <a:fld id="{80E1994F-3A96-4BFC-9935-A0F2A58A4CCE}" type="datetimeFigureOut">
               <a:rPr lang="en-IN" smtClean="0"/>
-              <a:t>21-01-2026</a:t>
+              <a:t>22-01-2026</a:t>
             </a:fld>
             <a:endParaRPr lang="en-IN"/>
           </a:p>
@@ -2688,7 +2835,7 @@
           <a:p>
             <a:fld id="{80E1994F-3A96-4BFC-9935-A0F2A58A4CCE}" type="datetimeFigureOut">
               <a:rPr lang="en-IN" smtClean="0"/>
-              <a:t>21-01-2026</a:t>
+              <a:t>22-01-2026</a:t>
             </a:fld>
             <a:endParaRPr lang="en-IN"/>
           </a:p>
@@ -2931,7 +3078,7 @@
           <a:p>
             <a:fld id="{80E1994F-3A96-4BFC-9935-A0F2A58A4CCE}" type="datetimeFigureOut">
               <a:rPr lang="en-IN" smtClean="0"/>
-              <a:t>21-01-2026</a:t>
+              <a:t>22-01-2026</a:t>
             </a:fld>
             <a:endParaRPr lang="en-IN"/>
           </a:p>
@@ -3441,6 +3588,666 @@
 </p:sld>
 </file>
 
+<file path=ppt/slides/slide10.xml><?xml version="1.0" encoding="utf-8"?>
+<p:sld xmlns:a="http://schemas.openxmlformats.org/drawingml/2006/main" xmlns:r="http://schemas.openxmlformats.org/officeDocument/2006/relationships" xmlns:p="http://schemas.openxmlformats.org/presentationml/2006/main">
+  <p:cSld>
+    <p:spTree>
+      <p:nvGrpSpPr>
+        <p:cNvPr id="1" name=""/>
+        <p:cNvGrpSpPr/>
+        <p:nvPr/>
+      </p:nvGrpSpPr>
+      <p:grpSpPr>
+        <a:xfrm>
+          <a:off x="0" y="0"/>
+          <a:ext cx="0" cy="0"/>
+          <a:chOff x="0" y="0"/>
+          <a:chExt cx="0" cy="0"/>
+        </a:xfrm>
+      </p:grpSpPr>
+      <p:sp>
+        <p:nvSpPr>
+          <p:cNvPr id="2" name="Title 1">
+            <a:extLst>
+              <a:ext uri="{FF2B5EF4-FFF2-40B4-BE49-F238E27FC236}">
+                <a16:creationId xmlns:a16="http://schemas.microsoft.com/office/drawing/2014/main" id="{58B79FCF-8C06-931C-99C8-9B1DC5614A11}"/>
+              </a:ext>
+            </a:extLst>
+          </p:cNvPr>
+          <p:cNvSpPr>
+            <a:spLocks noGrp="1"/>
+          </p:cNvSpPr>
+          <p:nvPr>
+            <p:ph type="title"/>
+          </p:nvPr>
+        </p:nvSpPr>
+        <p:spPr/>
+        <p:txBody>
+          <a:bodyPr/>
+          <a:lstStyle/>
+          <a:p>
+            <a:endParaRPr lang="en-IN"/>
+          </a:p>
+        </p:txBody>
+      </p:sp>
+      <p:sp>
+        <p:nvSpPr>
+          <p:cNvPr id="3" name="Content Placeholder 2">
+            <a:extLst>
+              <a:ext uri="{FF2B5EF4-FFF2-40B4-BE49-F238E27FC236}">
+                <a16:creationId xmlns:a16="http://schemas.microsoft.com/office/drawing/2014/main" id="{13C6AC42-E5E2-2F12-76AB-B0AE7943846C}"/>
+              </a:ext>
+            </a:extLst>
+          </p:cNvPr>
+          <p:cNvSpPr>
+            <a:spLocks noGrp="1"/>
+          </p:cNvSpPr>
+          <p:nvPr>
+            <p:ph idx="1"/>
+          </p:nvPr>
+        </p:nvSpPr>
+        <p:spPr/>
+        <p:txBody>
+          <a:bodyPr/>
+          <a:lstStyle/>
+          <a:p>
+            <a:endParaRPr lang="en-IN"/>
+          </a:p>
+        </p:txBody>
+      </p:sp>
+      <p:pic>
+        <p:nvPicPr>
+          <p:cNvPr id="5" name="Picture 4">
+            <a:extLst>
+              <a:ext uri="{FF2B5EF4-FFF2-40B4-BE49-F238E27FC236}">
+                <a16:creationId xmlns:a16="http://schemas.microsoft.com/office/drawing/2014/main" id="{1F78C17E-49DD-704A-6B59-AC3F48CBD3A4}"/>
+              </a:ext>
+            </a:extLst>
+          </p:cNvPr>
+          <p:cNvPicPr>
+            <a:picLocks noChangeAspect="1"/>
+          </p:cNvPicPr>
+          <p:nvPr/>
+        </p:nvPicPr>
+        <p:blipFill>
+          <a:blip r:embed="rId2"/>
+          <a:stretch>
+            <a:fillRect/>
+          </a:stretch>
+        </p:blipFill>
+        <p:spPr>
+          <a:xfrm>
+            <a:off x="2515436" y="681037"/>
+            <a:ext cx="7161127" cy="5019240"/>
+          </a:xfrm>
+          <a:prstGeom prst="rect">
+            <a:avLst/>
+          </a:prstGeom>
+        </p:spPr>
+      </p:pic>
+    </p:spTree>
+    <p:extLst>
+      <p:ext uri="{BB962C8B-B14F-4D97-AF65-F5344CB8AC3E}">
+        <p14:creationId xmlns:p14="http://schemas.microsoft.com/office/powerpoint/2010/main" val="4196342498"/>
+      </p:ext>
+    </p:extLst>
+  </p:cSld>
+  <p:clrMapOvr>
+    <a:masterClrMapping/>
+  </p:clrMapOvr>
+</p:sld>
+</file>
+
+<file path=ppt/slides/slide11.xml><?xml version="1.0" encoding="utf-8"?>
+<p:sld xmlns:a="http://schemas.openxmlformats.org/drawingml/2006/main" xmlns:r="http://schemas.openxmlformats.org/officeDocument/2006/relationships" xmlns:p="http://schemas.openxmlformats.org/presentationml/2006/main">
+  <p:cSld>
+    <p:spTree>
+      <p:nvGrpSpPr>
+        <p:cNvPr id="1" name=""/>
+        <p:cNvGrpSpPr/>
+        <p:nvPr/>
+      </p:nvGrpSpPr>
+      <p:grpSpPr>
+        <a:xfrm>
+          <a:off x="0" y="0"/>
+          <a:ext cx="0" cy="0"/>
+          <a:chOff x="0" y="0"/>
+          <a:chExt cx="0" cy="0"/>
+        </a:xfrm>
+      </p:grpSpPr>
+      <p:sp>
+        <p:nvSpPr>
+          <p:cNvPr id="2" name="Title 1">
+            <a:extLst>
+              <a:ext uri="{FF2B5EF4-FFF2-40B4-BE49-F238E27FC236}">
+                <a16:creationId xmlns:a16="http://schemas.microsoft.com/office/drawing/2014/main" id="{E482E3BE-57A1-745C-08F2-2EA61AB53003}"/>
+              </a:ext>
+            </a:extLst>
+          </p:cNvPr>
+          <p:cNvSpPr>
+            <a:spLocks noGrp="1"/>
+          </p:cNvSpPr>
+          <p:nvPr>
+            <p:ph type="title"/>
+          </p:nvPr>
+        </p:nvSpPr>
+        <p:spPr/>
+        <p:txBody>
+          <a:bodyPr/>
+          <a:lstStyle/>
+          <a:p>
+            <a:endParaRPr lang="en-IN"/>
+          </a:p>
+        </p:txBody>
+      </p:sp>
+      <p:sp>
+        <p:nvSpPr>
+          <p:cNvPr id="3" name="Content Placeholder 2">
+            <a:extLst>
+              <a:ext uri="{FF2B5EF4-FFF2-40B4-BE49-F238E27FC236}">
+                <a16:creationId xmlns:a16="http://schemas.microsoft.com/office/drawing/2014/main" id="{33FFA0FE-65FF-655E-11F1-E67086D34E01}"/>
+              </a:ext>
+            </a:extLst>
+          </p:cNvPr>
+          <p:cNvSpPr>
+            <a:spLocks noGrp="1"/>
+          </p:cNvSpPr>
+          <p:nvPr>
+            <p:ph idx="1"/>
+          </p:nvPr>
+        </p:nvSpPr>
+        <p:spPr/>
+        <p:txBody>
+          <a:bodyPr/>
+          <a:lstStyle/>
+          <a:p>
+            <a:endParaRPr lang="en-IN"/>
+          </a:p>
+        </p:txBody>
+      </p:sp>
+      <p:pic>
+        <p:nvPicPr>
+          <p:cNvPr id="5" name="Picture 4">
+            <a:extLst>
+              <a:ext uri="{FF2B5EF4-FFF2-40B4-BE49-F238E27FC236}">
+                <a16:creationId xmlns:a16="http://schemas.microsoft.com/office/drawing/2014/main" id="{45353D29-8A63-ECA1-781D-31FE6ACF3FB0}"/>
+              </a:ext>
+            </a:extLst>
+          </p:cNvPr>
+          <p:cNvPicPr>
+            <a:picLocks noChangeAspect="1"/>
+          </p:cNvPicPr>
+          <p:nvPr/>
+        </p:nvPicPr>
+        <p:blipFill>
+          <a:blip r:embed="rId2"/>
+          <a:stretch>
+            <a:fillRect/>
+          </a:stretch>
+        </p:blipFill>
+        <p:spPr>
+          <a:xfrm>
+            <a:off x="1385000" y="1027906"/>
+            <a:ext cx="9421999" cy="4351337"/>
+          </a:xfrm>
+          <a:prstGeom prst="rect">
+            <a:avLst/>
+          </a:prstGeom>
+        </p:spPr>
+      </p:pic>
+    </p:spTree>
+    <p:extLst>
+      <p:ext uri="{BB962C8B-B14F-4D97-AF65-F5344CB8AC3E}">
+        <p14:creationId xmlns:p14="http://schemas.microsoft.com/office/powerpoint/2010/main" val="3746935491"/>
+      </p:ext>
+    </p:extLst>
+  </p:cSld>
+  <p:clrMapOvr>
+    <a:masterClrMapping/>
+  </p:clrMapOvr>
+</p:sld>
+</file>
+
+<file path=ppt/slides/slide12.xml><?xml version="1.0" encoding="utf-8"?>
+<p:sld xmlns:a="http://schemas.openxmlformats.org/drawingml/2006/main" xmlns:r="http://schemas.openxmlformats.org/officeDocument/2006/relationships" xmlns:p="http://schemas.openxmlformats.org/presentationml/2006/main">
+  <p:cSld>
+    <p:spTree>
+      <p:nvGrpSpPr>
+        <p:cNvPr id="1" name=""/>
+        <p:cNvGrpSpPr/>
+        <p:nvPr/>
+      </p:nvGrpSpPr>
+      <p:grpSpPr>
+        <a:xfrm>
+          <a:off x="0" y="0"/>
+          <a:ext cx="0" cy="0"/>
+          <a:chOff x="0" y="0"/>
+          <a:chExt cx="0" cy="0"/>
+        </a:xfrm>
+      </p:grpSpPr>
+      <p:sp>
+        <p:nvSpPr>
+          <p:cNvPr id="2" name="Title 1">
+            <a:extLst>
+              <a:ext uri="{FF2B5EF4-FFF2-40B4-BE49-F238E27FC236}">
+                <a16:creationId xmlns:a16="http://schemas.microsoft.com/office/drawing/2014/main" id="{1F676EBF-82CE-6639-93C0-6F1C1E07E95B}"/>
+              </a:ext>
+            </a:extLst>
+          </p:cNvPr>
+          <p:cNvSpPr>
+            <a:spLocks noGrp="1"/>
+          </p:cNvSpPr>
+          <p:nvPr>
+            <p:ph type="title"/>
+          </p:nvPr>
+        </p:nvSpPr>
+        <p:spPr/>
+        <p:txBody>
+          <a:bodyPr/>
+          <a:lstStyle/>
+          <a:p>
+            <a:endParaRPr lang="en-IN"/>
+          </a:p>
+        </p:txBody>
+      </p:sp>
+      <p:sp>
+        <p:nvSpPr>
+          <p:cNvPr id="3" name="Content Placeholder 2">
+            <a:extLst>
+              <a:ext uri="{FF2B5EF4-FFF2-40B4-BE49-F238E27FC236}">
+                <a16:creationId xmlns:a16="http://schemas.microsoft.com/office/drawing/2014/main" id="{BF007788-B4E4-8A37-2A86-B8ECAA10416A}"/>
+              </a:ext>
+            </a:extLst>
+          </p:cNvPr>
+          <p:cNvSpPr>
+            <a:spLocks noGrp="1"/>
+          </p:cNvSpPr>
+          <p:nvPr>
+            <p:ph idx="1"/>
+          </p:nvPr>
+        </p:nvSpPr>
+        <p:spPr/>
+        <p:txBody>
+          <a:bodyPr/>
+          <a:lstStyle/>
+          <a:p>
+            <a:endParaRPr lang="en-IN"/>
+          </a:p>
+        </p:txBody>
+      </p:sp>
+      <p:pic>
+        <p:nvPicPr>
+          <p:cNvPr id="5" name="Picture 4">
+            <a:extLst>
+              <a:ext uri="{FF2B5EF4-FFF2-40B4-BE49-F238E27FC236}">
+                <a16:creationId xmlns:a16="http://schemas.microsoft.com/office/drawing/2014/main" id="{A98AF5B2-EEB4-64BE-1AAF-4DF8F789AE90}"/>
+              </a:ext>
+            </a:extLst>
+          </p:cNvPr>
+          <p:cNvPicPr>
+            <a:picLocks noChangeAspect="1"/>
+          </p:cNvPicPr>
+          <p:nvPr/>
+        </p:nvPicPr>
+        <p:blipFill>
+          <a:blip r:embed="rId2"/>
+          <a:stretch>
+            <a:fillRect/>
+          </a:stretch>
+        </p:blipFill>
+        <p:spPr>
+          <a:xfrm>
+            <a:off x="593681" y="458283"/>
+            <a:ext cx="11004638" cy="5054878"/>
+          </a:xfrm>
+          <a:prstGeom prst="rect">
+            <a:avLst/>
+          </a:prstGeom>
+        </p:spPr>
+      </p:pic>
+    </p:spTree>
+    <p:extLst>
+      <p:ext uri="{BB962C8B-B14F-4D97-AF65-F5344CB8AC3E}">
+        <p14:creationId xmlns:p14="http://schemas.microsoft.com/office/powerpoint/2010/main" val="2511080234"/>
+      </p:ext>
+    </p:extLst>
+  </p:cSld>
+  <p:clrMapOvr>
+    <a:masterClrMapping/>
+  </p:clrMapOvr>
+</p:sld>
+</file>
+
+<file path=ppt/slides/slide13.xml><?xml version="1.0" encoding="utf-8"?>
+<p:sld xmlns:a="http://schemas.openxmlformats.org/drawingml/2006/main" xmlns:r="http://schemas.openxmlformats.org/officeDocument/2006/relationships" xmlns:p="http://schemas.openxmlformats.org/presentationml/2006/main">
+  <p:cSld>
+    <p:spTree>
+      <p:nvGrpSpPr>
+        <p:cNvPr id="1" name=""/>
+        <p:cNvGrpSpPr/>
+        <p:nvPr/>
+      </p:nvGrpSpPr>
+      <p:grpSpPr>
+        <a:xfrm>
+          <a:off x="0" y="0"/>
+          <a:ext cx="0" cy="0"/>
+          <a:chOff x="0" y="0"/>
+          <a:chExt cx="0" cy="0"/>
+        </a:xfrm>
+      </p:grpSpPr>
+      <p:sp>
+        <p:nvSpPr>
+          <p:cNvPr id="2" name="Title 1">
+            <a:extLst>
+              <a:ext uri="{FF2B5EF4-FFF2-40B4-BE49-F238E27FC236}">
+                <a16:creationId xmlns:a16="http://schemas.microsoft.com/office/drawing/2014/main" id="{4040EB04-9235-4106-0BCE-02F6363FA1D2}"/>
+              </a:ext>
+            </a:extLst>
+          </p:cNvPr>
+          <p:cNvSpPr>
+            <a:spLocks noGrp="1"/>
+          </p:cNvSpPr>
+          <p:nvPr>
+            <p:ph type="title"/>
+          </p:nvPr>
+        </p:nvSpPr>
+        <p:spPr/>
+        <p:txBody>
+          <a:bodyPr/>
+          <a:lstStyle/>
+          <a:p>
+            <a:endParaRPr lang="en-IN"/>
+          </a:p>
+        </p:txBody>
+      </p:sp>
+      <p:sp>
+        <p:nvSpPr>
+          <p:cNvPr id="3" name="Content Placeholder 2">
+            <a:extLst>
+              <a:ext uri="{FF2B5EF4-FFF2-40B4-BE49-F238E27FC236}">
+                <a16:creationId xmlns:a16="http://schemas.microsoft.com/office/drawing/2014/main" id="{55E377E9-A52F-724E-06B9-CB3F3286F5B1}"/>
+              </a:ext>
+            </a:extLst>
+          </p:cNvPr>
+          <p:cNvSpPr>
+            <a:spLocks noGrp="1"/>
+          </p:cNvSpPr>
+          <p:nvPr>
+            <p:ph idx="1"/>
+          </p:nvPr>
+        </p:nvSpPr>
+        <p:spPr/>
+        <p:txBody>
+          <a:bodyPr/>
+          <a:lstStyle/>
+          <a:p>
+            <a:endParaRPr lang="en-IN"/>
+          </a:p>
+        </p:txBody>
+      </p:sp>
+      <p:pic>
+        <p:nvPicPr>
+          <p:cNvPr id="5" name="Picture 4">
+            <a:extLst>
+              <a:ext uri="{FF2B5EF4-FFF2-40B4-BE49-F238E27FC236}">
+                <a16:creationId xmlns:a16="http://schemas.microsoft.com/office/drawing/2014/main" id="{B202F149-EEF0-53A5-BF9A-F661BDE246BD}"/>
+              </a:ext>
+            </a:extLst>
+          </p:cNvPr>
+          <p:cNvPicPr>
+            <a:picLocks noChangeAspect="1"/>
+          </p:cNvPicPr>
+          <p:nvPr/>
+        </p:nvPicPr>
+        <p:blipFill>
+          <a:blip r:embed="rId2"/>
+          <a:stretch>
+            <a:fillRect/>
+          </a:stretch>
+        </p:blipFill>
+        <p:spPr>
+          <a:xfrm>
+            <a:off x="1657515" y="365125"/>
+            <a:ext cx="8876969" cy="5564890"/>
+          </a:xfrm>
+          <a:prstGeom prst="rect">
+            <a:avLst/>
+          </a:prstGeom>
+        </p:spPr>
+      </p:pic>
+    </p:spTree>
+    <p:extLst>
+      <p:ext uri="{BB962C8B-B14F-4D97-AF65-F5344CB8AC3E}">
+        <p14:creationId xmlns:p14="http://schemas.microsoft.com/office/powerpoint/2010/main" val="3063373348"/>
+      </p:ext>
+    </p:extLst>
+  </p:cSld>
+  <p:clrMapOvr>
+    <a:masterClrMapping/>
+  </p:clrMapOvr>
+</p:sld>
+</file>
+
+<file path=ppt/slides/slide14.xml><?xml version="1.0" encoding="utf-8"?>
+<p:sld xmlns:a="http://schemas.openxmlformats.org/drawingml/2006/main" xmlns:r="http://schemas.openxmlformats.org/officeDocument/2006/relationships" xmlns:p="http://schemas.openxmlformats.org/presentationml/2006/main">
+  <p:cSld>
+    <p:spTree>
+      <p:nvGrpSpPr>
+        <p:cNvPr id="1" name=""/>
+        <p:cNvGrpSpPr/>
+        <p:nvPr/>
+      </p:nvGrpSpPr>
+      <p:grpSpPr>
+        <a:xfrm>
+          <a:off x="0" y="0"/>
+          <a:ext cx="0" cy="0"/>
+          <a:chOff x="0" y="0"/>
+          <a:chExt cx="0" cy="0"/>
+        </a:xfrm>
+      </p:grpSpPr>
+      <p:sp>
+        <p:nvSpPr>
+          <p:cNvPr id="2" name="Title 1">
+            <a:extLst>
+              <a:ext uri="{FF2B5EF4-FFF2-40B4-BE49-F238E27FC236}">
+                <a16:creationId xmlns:a16="http://schemas.microsoft.com/office/drawing/2014/main" id="{A0F2DC2D-95A3-504B-400E-8E101AC39213}"/>
+              </a:ext>
+            </a:extLst>
+          </p:cNvPr>
+          <p:cNvSpPr>
+            <a:spLocks noGrp="1"/>
+          </p:cNvSpPr>
+          <p:nvPr>
+            <p:ph type="title"/>
+          </p:nvPr>
+        </p:nvSpPr>
+        <p:spPr/>
+        <p:txBody>
+          <a:bodyPr/>
+          <a:lstStyle/>
+          <a:p>
+            <a:endParaRPr lang="en-IN"/>
+          </a:p>
+        </p:txBody>
+      </p:sp>
+      <p:sp>
+        <p:nvSpPr>
+          <p:cNvPr id="3" name="Content Placeholder 2">
+            <a:extLst>
+              <a:ext uri="{FF2B5EF4-FFF2-40B4-BE49-F238E27FC236}">
+                <a16:creationId xmlns:a16="http://schemas.microsoft.com/office/drawing/2014/main" id="{25F207AF-F627-E671-8CA3-18C09B00C78D}"/>
+              </a:ext>
+            </a:extLst>
+          </p:cNvPr>
+          <p:cNvSpPr>
+            <a:spLocks noGrp="1"/>
+          </p:cNvSpPr>
+          <p:nvPr>
+            <p:ph idx="1"/>
+          </p:nvPr>
+        </p:nvSpPr>
+        <p:spPr/>
+        <p:txBody>
+          <a:bodyPr/>
+          <a:lstStyle/>
+          <a:p>
+            <a:endParaRPr lang="en-IN"/>
+          </a:p>
+        </p:txBody>
+      </p:sp>
+      <p:pic>
+        <p:nvPicPr>
+          <p:cNvPr id="5" name="Picture 4">
+            <a:extLst>
+              <a:ext uri="{FF2B5EF4-FFF2-40B4-BE49-F238E27FC236}">
+                <a16:creationId xmlns:a16="http://schemas.microsoft.com/office/drawing/2014/main" id="{538C6867-832F-7B34-635B-052BFB7A3FC2}"/>
+              </a:ext>
+            </a:extLst>
+          </p:cNvPr>
+          <p:cNvPicPr>
+            <a:picLocks noChangeAspect="1"/>
+          </p:cNvPicPr>
+          <p:nvPr/>
+        </p:nvPicPr>
+        <p:blipFill>
+          <a:blip r:embed="rId2"/>
+          <a:stretch>
+            <a:fillRect/>
+          </a:stretch>
+        </p:blipFill>
+        <p:spPr>
+          <a:xfrm>
+            <a:off x="419100" y="741999"/>
+            <a:ext cx="11353800" cy="4290376"/>
+          </a:xfrm>
+          <a:prstGeom prst="rect">
+            <a:avLst/>
+          </a:prstGeom>
+        </p:spPr>
+      </p:pic>
+    </p:spTree>
+    <p:extLst>
+      <p:ext uri="{BB962C8B-B14F-4D97-AF65-F5344CB8AC3E}">
+        <p14:creationId xmlns:p14="http://schemas.microsoft.com/office/powerpoint/2010/main" val="3463945465"/>
+      </p:ext>
+    </p:extLst>
+  </p:cSld>
+  <p:clrMapOvr>
+    <a:masterClrMapping/>
+  </p:clrMapOvr>
+</p:sld>
+</file>
+
+<file path=ppt/slides/slide15.xml><?xml version="1.0" encoding="utf-8"?>
+<p:sld xmlns:a="http://schemas.openxmlformats.org/drawingml/2006/main" xmlns:r="http://schemas.openxmlformats.org/officeDocument/2006/relationships" xmlns:p="http://schemas.openxmlformats.org/presentationml/2006/main">
+  <p:cSld>
+    <p:spTree>
+      <p:nvGrpSpPr>
+        <p:cNvPr id="1" name=""/>
+        <p:cNvGrpSpPr/>
+        <p:nvPr/>
+      </p:nvGrpSpPr>
+      <p:grpSpPr>
+        <a:xfrm>
+          <a:off x="0" y="0"/>
+          <a:ext cx="0" cy="0"/>
+          <a:chOff x="0" y="0"/>
+          <a:chExt cx="0" cy="0"/>
+        </a:xfrm>
+      </p:grpSpPr>
+      <p:sp>
+        <p:nvSpPr>
+          <p:cNvPr id="2" name="Title 1">
+            <a:extLst>
+              <a:ext uri="{FF2B5EF4-FFF2-40B4-BE49-F238E27FC236}">
+                <a16:creationId xmlns:a16="http://schemas.microsoft.com/office/drawing/2014/main" id="{4F1C3922-AD16-2343-F718-58E93C856C0E}"/>
+              </a:ext>
+            </a:extLst>
+          </p:cNvPr>
+          <p:cNvSpPr>
+            <a:spLocks noGrp="1"/>
+          </p:cNvSpPr>
+          <p:nvPr>
+            <p:ph type="title"/>
+          </p:nvPr>
+        </p:nvSpPr>
+        <p:spPr/>
+        <p:txBody>
+          <a:bodyPr/>
+          <a:lstStyle/>
+          <a:p>
+            <a:endParaRPr lang="en-IN"/>
+          </a:p>
+        </p:txBody>
+      </p:sp>
+      <p:sp>
+        <p:nvSpPr>
+          <p:cNvPr id="3" name="Content Placeholder 2">
+            <a:extLst>
+              <a:ext uri="{FF2B5EF4-FFF2-40B4-BE49-F238E27FC236}">
+                <a16:creationId xmlns:a16="http://schemas.microsoft.com/office/drawing/2014/main" id="{B56A1025-91DB-D356-AF3D-FBE631E34092}"/>
+              </a:ext>
+            </a:extLst>
+          </p:cNvPr>
+          <p:cNvSpPr>
+            <a:spLocks noGrp="1"/>
+          </p:cNvSpPr>
+          <p:nvPr>
+            <p:ph idx="1"/>
+          </p:nvPr>
+        </p:nvSpPr>
+        <p:spPr/>
+        <p:txBody>
+          <a:bodyPr/>
+          <a:lstStyle/>
+          <a:p>
+            <a:endParaRPr lang="en-IN"/>
+          </a:p>
+        </p:txBody>
+      </p:sp>
+      <p:pic>
+        <p:nvPicPr>
+          <p:cNvPr id="5" name="Picture 4">
+            <a:extLst>
+              <a:ext uri="{FF2B5EF4-FFF2-40B4-BE49-F238E27FC236}">
+                <a16:creationId xmlns:a16="http://schemas.microsoft.com/office/drawing/2014/main" id="{66E1F6D4-2C2B-13B2-6CE6-C0E41FC484DC}"/>
+              </a:ext>
+            </a:extLst>
+          </p:cNvPr>
+          <p:cNvPicPr>
+            <a:picLocks noChangeAspect="1"/>
+          </p:cNvPicPr>
+          <p:nvPr/>
+        </p:nvPicPr>
+        <p:blipFill>
+          <a:blip r:embed="rId2"/>
+          <a:stretch>
+            <a:fillRect/>
+          </a:stretch>
+        </p:blipFill>
+        <p:spPr>
+          <a:xfrm>
+            <a:off x="556009" y="1027906"/>
+            <a:ext cx="11079981" cy="4006830"/>
+          </a:xfrm>
+          <a:prstGeom prst="rect">
+            <a:avLst/>
+          </a:prstGeom>
+        </p:spPr>
+      </p:pic>
+    </p:spTree>
+    <p:extLst>
+      <p:ext uri="{BB962C8B-B14F-4D97-AF65-F5344CB8AC3E}">
+        <p14:creationId xmlns:p14="http://schemas.microsoft.com/office/powerpoint/2010/main" val="4023448103"/>
+      </p:ext>
+    </p:extLst>
+  </p:cSld>
+  <p:clrMapOvr>
+    <a:masterClrMapping/>
+  </p:clrMapOvr>
+</p:sld>
+</file>
+
 <file path=ppt/slides/slide2.xml><?xml version="1.0" encoding="utf-8"?>
 <p:sld xmlns:a="http://schemas.openxmlformats.org/drawingml/2006/main" xmlns:r="http://schemas.openxmlformats.org/officeDocument/2006/relationships" xmlns:p="http://schemas.openxmlformats.org/presentationml/2006/main">
   <p:cSld>
@@ -4092,6 +4899,226 @@
     <p:extLst>
       <p:ext uri="{BB962C8B-B14F-4D97-AF65-F5344CB8AC3E}">
         <p14:creationId xmlns:p14="http://schemas.microsoft.com/office/powerpoint/2010/main" val="2311113882"/>
+      </p:ext>
+    </p:extLst>
+  </p:cSld>
+  <p:clrMapOvr>
+    <a:masterClrMapping/>
+  </p:clrMapOvr>
+</p:sld>
+</file>
+
+<file path=ppt/slides/slide8.xml><?xml version="1.0" encoding="utf-8"?>
+<p:sld xmlns:a="http://schemas.openxmlformats.org/drawingml/2006/main" xmlns:r="http://schemas.openxmlformats.org/officeDocument/2006/relationships" xmlns:p="http://schemas.openxmlformats.org/presentationml/2006/main">
+  <p:cSld>
+    <p:spTree>
+      <p:nvGrpSpPr>
+        <p:cNvPr id="1" name=""/>
+        <p:cNvGrpSpPr/>
+        <p:nvPr/>
+      </p:nvGrpSpPr>
+      <p:grpSpPr>
+        <a:xfrm>
+          <a:off x="0" y="0"/>
+          <a:ext cx="0" cy="0"/>
+          <a:chOff x="0" y="0"/>
+          <a:chExt cx="0" cy="0"/>
+        </a:xfrm>
+      </p:grpSpPr>
+      <p:sp>
+        <p:nvSpPr>
+          <p:cNvPr id="2" name="Title 1">
+            <a:extLst>
+              <a:ext uri="{FF2B5EF4-FFF2-40B4-BE49-F238E27FC236}">
+                <a16:creationId xmlns:a16="http://schemas.microsoft.com/office/drawing/2014/main" id="{A848FB46-FF64-532B-29FC-CAAF6AFB74E2}"/>
+              </a:ext>
+            </a:extLst>
+          </p:cNvPr>
+          <p:cNvSpPr>
+            <a:spLocks noGrp="1"/>
+          </p:cNvSpPr>
+          <p:nvPr>
+            <p:ph type="title"/>
+          </p:nvPr>
+        </p:nvSpPr>
+        <p:spPr/>
+        <p:txBody>
+          <a:bodyPr/>
+          <a:lstStyle/>
+          <a:p>
+            <a:endParaRPr lang="en-IN"/>
+          </a:p>
+        </p:txBody>
+      </p:sp>
+      <p:sp>
+        <p:nvSpPr>
+          <p:cNvPr id="3" name="Content Placeholder 2">
+            <a:extLst>
+              <a:ext uri="{FF2B5EF4-FFF2-40B4-BE49-F238E27FC236}">
+                <a16:creationId xmlns:a16="http://schemas.microsoft.com/office/drawing/2014/main" id="{9A47E2EC-54FF-9E80-E211-C8F6FEC5FF78}"/>
+              </a:ext>
+            </a:extLst>
+          </p:cNvPr>
+          <p:cNvSpPr>
+            <a:spLocks noGrp="1"/>
+          </p:cNvSpPr>
+          <p:nvPr>
+            <p:ph idx="1"/>
+          </p:nvPr>
+        </p:nvSpPr>
+        <p:spPr/>
+        <p:txBody>
+          <a:bodyPr/>
+          <a:lstStyle/>
+          <a:p>
+            <a:endParaRPr lang="en-IN"/>
+          </a:p>
+        </p:txBody>
+      </p:sp>
+      <p:pic>
+        <p:nvPicPr>
+          <p:cNvPr id="5" name="Picture 4">
+            <a:extLst>
+              <a:ext uri="{FF2B5EF4-FFF2-40B4-BE49-F238E27FC236}">
+                <a16:creationId xmlns:a16="http://schemas.microsoft.com/office/drawing/2014/main" id="{B0F2B126-A5E2-990A-7443-740C83055A2A}"/>
+              </a:ext>
+            </a:extLst>
+          </p:cNvPr>
+          <p:cNvPicPr>
+            <a:picLocks noChangeAspect="1"/>
+          </p:cNvPicPr>
+          <p:nvPr/>
+        </p:nvPicPr>
+        <p:blipFill>
+          <a:blip r:embed="rId2"/>
+          <a:stretch>
+            <a:fillRect/>
+          </a:stretch>
+        </p:blipFill>
+        <p:spPr>
+          <a:xfrm>
+            <a:off x="1871073" y="275785"/>
+            <a:ext cx="8449854" cy="6306430"/>
+          </a:xfrm>
+          <a:prstGeom prst="rect">
+            <a:avLst/>
+          </a:prstGeom>
+        </p:spPr>
+      </p:pic>
+    </p:spTree>
+    <p:extLst>
+      <p:ext uri="{BB962C8B-B14F-4D97-AF65-F5344CB8AC3E}">
+        <p14:creationId xmlns:p14="http://schemas.microsoft.com/office/powerpoint/2010/main" val="243591831"/>
+      </p:ext>
+    </p:extLst>
+  </p:cSld>
+  <p:clrMapOvr>
+    <a:masterClrMapping/>
+  </p:clrMapOvr>
+</p:sld>
+</file>
+
+<file path=ppt/slides/slide9.xml><?xml version="1.0" encoding="utf-8"?>
+<p:sld xmlns:a="http://schemas.openxmlformats.org/drawingml/2006/main" xmlns:r="http://schemas.openxmlformats.org/officeDocument/2006/relationships" xmlns:p="http://schemas.openxmlformats.org/presentationml/2006/main">
+  <p:cSld>
+    <p:spTree>
+      <p:nvGrpSpPr>
+        <p:cNvPr id="1" name=""/>
+        <p:cNvGrpSpPr/>
+        <p:nvPr/>
+      </p:nvGrpSpPr>
+      <p:grpSpPr>
+        <a:xfrm>
+          <a:off x="0" y="0"/>
+          <a:ext cx="0" cy="0"/>
+          <a:chOff x="0" y="0"/>
+          <a:chExt cx="0" cy="0"/>
+        </a:xfrm>
+      </p:grpSpPr>
+      <p:sp>
+        <p:nvSpPr>
+          <p:cNvPr id="2" name="Title 1">
+            <a:extLst>
+              <a:ext uri="{FF2B5EF4-FFF2-40B4-BE49-F238E27FC236}">
+                <a16:creationId xmlns:a16="http://schemas.microsoft.com/office/drawing/2014/main" id="{EEA6CCB3-05B9-7B06-2FD3-0507EAAF498D}"/>
+              </a:ext>
+            </a:extLst>
+          </p:cNvPr>
+          <p:cNvSpPr>
+            <a:spLocks noGrp="1"/>
+          </p:cNvSpPr>
+          <p:nvPr>
+            <p:ph type="title"/>
+          </p:nvPr>
+        </p:nvSpPr>
+        <p:spPr/>
+        <p:txBody>
+          <a:bodyPr/>
+          <a:lstStyle/>
+          <a:p>
+            <a:endParaRPr lang="en-IN"/>
+          </a:p>
+        </p:txBody>
+      </p:sp>
+      <p:sp>
+        <p:nvSpPr>
+          <p:cNvPr id="3" name="Content Placeholder 2">
+            <a:extLst>
+              <a:ext uri="{FF2B5EF4-FFF2-40B4-BE49-F238E27FC236}">
+                <a16:creationId xmlns:a16="http://schemas.microsoft.com/office/drawing/2014/main" id="{B5036FDD-4357-CF76-0B9A-CE036F55E1C8}"/>
+              </a:ext>
+            </a:extLst>
+          </p:cNvPr>
+          <p:cNvSpPr>
+            <a:spLocks noGrp="1"/>
+          </p:cNvSpPr>
+          <p:nvPr>
+            <p:ph idx="1"/>
+          </p:nvPr>
+        </p:nvSpPr>
+        <p:spPr/>
+        <p:txBody>
+          <a:bodyPr/>
+          <a:lstStyle/>
+          <a:p>
+            <a:endParaRPr lang="en-IN"/>
+          </a:p>
+        </p:txBody>
+      </p:sp>
+      <p:pic>
+        <p:nvPicPr>
+          <p:cNvPr id="5" name="Picture 4">
+            <a:extLst>
+              <a:ext uri="{FF2B5EF4-FFF2-40B4-BE49-F238E27FC236}">
+                <a16:creationId xmlns:a16="http://schemas.microsoft.com/office/drawing/2014/main" id="{3A12D3BA-D023-50ED-AD22-0C402796BC1C}"/>
+              </a:ext>
+            </a:extLst>
+          </p:cNvPr>
+          <p:cNvPicPr>
+            <a:picLocks noChangeAspect="1"/>
+          </p:cNvPicPr>
+          <p:nvPr/>
+        </p:nvPicPr>
+        <p:blipFill>
+          <a:blip r:embed="rId2"/>
+          <a:stretch>
+            <a:fillRect/>
+          </a:stretch>
+        </p:blipFill>
+        <p:spPr>
+          <a:xfrm>
+            <a:off x="2065575" y="1027906"/>
+            <a:ext cx="7530496" cy="4547016"/>
+          </a:xfrm>
+          <a:prstGeom prst="rect">
+            <a:avLst/>
+          </a:prstGeom>
+        </p:spPr>
+      </p:pic>
+    </p:spTree>
+    <p:extLst>
+      <p:ext uri="{BB962C8B-B14F-4D97-AF65-F5344CB8AC3E}">
+        <p14:creationId xmlns:p14="http://schemas.microsoft.com/office/powerpoint/2010/main" val="1351986072"/>
       </p:ext>
     </p:extLst>
   </p:cSld>

--- a/IV Sem/SCM/Git Basics.pptx
+++ b/IV Sem/SCM/Git Basics.pptx
@@ -20,6 +20,13 @@
     <p:sldId id="268" r:id="rId14"/>
     <p:sldId id="269" r:id="rId15"/>
     <p:sldId id="270" r:id="rId16"/>
+    <p:sldId id="271" r:id="rId17"/>
+    <p:sldId id="272" r:id="rId18"/>
+    <p:sldId id="273" r:id="rId19"/>
+    <p:sldId id="274" r:id="rId20"/>
+    <p:sldId id="275" r:id="rId21"/>
+    <p:sldId id="276" r:id="rId22"/>
+    <p:sldId id="277" r:id="rId23"/>
   </p:sldIdLst>
   <p:sldSz cx="12192000" cy="6858000"/>
   <p:notesSz cx="6858000" cy="9144000"/>
@@ -130,8 +137,8 @@
 <pc:chgInfo xmlns:a="http://schemas.openxmlformats.org/drawingml/2006/main" xmlns:r="http://schemas.openxmlformats.org/officeDocument/2006/relationships" xmlns:ac="http://schemas.microsoft.com/office/drawing/2013/main/command" xmlns:pc="http://schemas.microsoft.com/office/powerpoint/2013/main/command">
   <pc:docChgLst>
     <pc:chgData name="Utkarsh Agarwal" userId="7a1216fa42ee05d0" providerId="LiveId" clId="{5A8ABE04-300D-46CD-9942-40B59078845C}"/>
-    <pc:docChg chg="addSld modSld">
-      <pc:chgData name="Utkarsh Agarwal" userId="7a1216fa42ee05d0" providerId="LiveId" clId="{5A8ABE04-300D-46CD-9942-40B59078845C}" dt="2026-01-22T18:10:48.968" v="33" actId="1076"/>
+    <pc:docChg chg="undo custSel addSld delSld modSld">
+      <pc:chgData name="Utkarsh Agarwal" userId="7a1216fa42ee05d0" providerId="LiveId" clId="{5A8ABE04-300D-46CD-9942-40B59078845C}" dt="2026-02-05T01:54:59.248" v="66" actId="1076"/>
       <pc:docMkLst>
         <pc:docMk/>
       </pc:docMkLst>
@@ -255,6 +262,118 @@
           </ac:picMkLst>
         </pc:picChg>
       </pc:sldChg>
+      <pc:sldChg chg="addSp new mod">
+        <pc:chgData name="Utkarsh Agarwal" userId="7a1216fa42ee05d0" providerId="LiveId" clId="{5A8ABE04-300D-46CD-9942-40B59078845C}" dt="2026-02-05T00:24:18.091" v="35" actId="22"/>
+        <pc:sldMkLst>
+          <pc:docMk/>
+          <pc:sldMk cId="2330140429" sldId="271"/>
+        </pc:sldMkLst>
+        <pc:picChg chg="add">
+          <ac:chgData name="Utkarsh Agarwal" userId="7a1216fa42ee05d0" providerId="LiveId" clId="{5A8ABE04-300D-46CD-9942-40B59078845C}" dt="2026-02-05T00:24:18.091" v="35" actId="22"/>
+          <ac:picMkLst>
+            <pc:docMk/>
+            <pc:sldMk cId="2330140429" sldId="271"/>
+            <ac:picMk id="5" creationId="{1C4B4A27-4382-C4B6-D947-025708AB7DFA}"/>
+          </ac:picMkLst>
+        </pc:picChg>
+      </pc:sldChg>
+      <pc:sldChg chg="addSp modSp new mod">
+        <pc:chgData name="Utkarsh Agarwal" userId="7a1216fa42ee05d0" providerId="LiveId" clId="{5A8ABE04-300D-46CD-9942-40B59078845C}" dt="2026-02-05T00:26:46.336" v="39" actId="1076"/>
+        <pc:sldMkLst>
+          <pc:docMk/>
+          <pc:sldMk cId="728988289" sldId="272"/>
+        </pc:sldMkLst>
+        <pc:picChg chg="add mod">
+          <ac:chgData name="Utkarsh Agarwal" userId="7a1216fa42ee05d0" providerId="LiveId" clId="{5A8ABE04-300D-46CD-9942-40B59078845C}" dt="2026-02-05T00:26:46.336" v="39" actId="1076"/>
+          <ac:picMkLst>
+            <pc:docMk/>
+            <pc:sldMk cId="728988289" sldId="272"/>
+            <ac:picMk id="5" creationId="{1B0A50CB-9BF8-9996-9D42-CD8220A77A6A}"/>
+          </ac:picMkLst>
+        </pc:picChg>
+      </pc:sldChg>
+      <pc:sldChg chg="addSp modSp new mod">
+        <pc:chgData name="Utkarsh Agarwal" userId="7a1216fa42ee05d0" providerId="LiveId" clId="{5A8ABE04-300D-46CD-9942-40B59078845C}" dt="2026-02-05T01:25:45.343" v="49" actId="1076"/>
+        <pc:sldMkLst>
+          <pc:docMk/>
+          <pc:sldMk cId="2384102187" sldId="273"/>
+        </pc:sldMkLst>
+        <pc:picChg chg="add mod">
+          <ac:chgData name="Utkarsh Agarwal" userId="7a1216fa42ee05d0" providerId="LiveId" clId="{5A8ABE04-300D-46CD-9942-40B59078845C}" dt="2026-02-05T01:25:45.343" v="49" actId="1076"/>
+          <ac:picMkLst>
+            <pc:docMk/>
+            <pc:sldMk cId="2384102187" sldId="273"/>
+            <ac:picMk id="5" creationId="{F860726A-CD0C-B818-EB80-D34153235C57}"/>
+          </ac:picMkLst>
+        </pc:picChg>
+      </pc:sldChg>
+      <pc:sldChg chg="new del">
+        <pc:chgData name="Utkarsh Agarwal" userId="7a1216fa42ee05d0" providerId="LiveId" clId="{5A8ABE04-300D-46CD-9942-40B59078845C}" dt="2026-02-05T01:25:28.320" v="41" actId="680"/>
+        <pc:sldMkLst>
+          <pc:docMk/>
+          <pc:sldMk cId="4218539260" sldId="273"/>
+        </pc:sldMkLst>
+      </pc:sldChg>
+      <pc:sldChg chg="addSp new mod">
+        <pc:chgData name="Utkarsh Agarwal" userId="7a1216fa42ee05d0" providerId="LiveId" clId="{5A8ABE04-300D-46CD-9942-40B59078845C}" dt="2026-02-05T01:36:59.271" v="51" actId="22"/>
+        <pc:sldMkLst>
+          <pc:docMk/>
+          <pc:sldMk cId="2858694303" sldId="274"/>
+        </pc:sldMkLst>
+        <pc:picChg chg="add">
+          <ac:chgData name="Utkarsh Agarwal" userId="7a1216fa42ee05d0" providerId="LiveId" clId="{5A8ABE04-300D-46CD-9942-40B59078845C}" dt="2026-02-05T01:36:59.271" v="51" actId="22"/>
+          <ac:picMkLst>
+            <pc:docMk/>
+            <pc:sldMk cId="2858694303" sldId="274"/>
+            <ac:picMk id="5" creationId="{5FED6630-DADE-B57B-F0DB-7AD34308404E}"/>
+          </ac:picMkLst>
+        </pc:picChg>
+      </pc:sldChg>
+      <pc:sldChg chg="addSp modSp new mod">
+        <pc:chgData name="Utkarsh Agarwal" userId="7a1216fa42ee05d0" providerId="LiveId" clId="{5A8ABE04-300D-46CD-9942-40B59078845C}" dt="2026-02-05T01:37:39.263" v="58" actId="1076"/>
+        <pc:sldMkLst>
+          <pc:docMk/>
+          <pc:sldMk cId="46837287" sldId="275"/>
+        </pc:sldMkLst>
+        <pc:picChg chg="add mod">
+          <ac:chgData name="Utkarsh Agarwal" userId="7a1216fa42ee05d0" providerId="LiveId" clId="{5A8ABE04-300D-46CD-9942-40B59078845C}" dt="2026-02-05T01:37:39.263" v="58" actId="1076"/>
+          <ac:picMkLst>
+            <pc:docMk/>
+            <pc:sldMk cId="46837287" sldId="275"/>
+            <ac:picMk id="5" creationId="{0C9EC71D-0F60-EE00-29A2-52337EECFAF9}"/>
+          </ac:picMkLst>
+        </pc:picChg>
+      </pc:sldChg>
+      <pc:sldChg chg="addSp modSp new mod">
+        <pc:chgData name="Utkarsh Agarwal" userId="7a1216fa42ee05d0" providerId="LiveId" clId="{5A8ABE04-300D-46CD-9942-40B59078845C}" dt="2026-02-05T01:53:26.064" v="62" actId="1076"/>
+        <pc:sldMkLst>
+          <pc:docMk/>
+          <pc:sldMk cId="4021678318" sldId="276"/>
+        </pc:sldMkLst>
+        <pc:picChg chg="add mod">
+          <ac:chgData name="Utkarsh Agarwal" userId="7a1216fa42ee05d0" providerId="LiveId" clId="{5A8ABE04-300D-46CD-9942-40B59078845C}" dt="2026-02-05T01:53:26.064" v="62" actId="1076"/>
+          <ac:picMkLst>
+            <pc:docMk/>
+            <pc:sldMk cId="4021678318" sldId="276"/>
+            <ac:picMk id="5" creationId="{2C4634BF-7D5A-3568-2C69-C8E938EDA442}"/>
+          </ac:picMkLst>
+        </pc:picChg>
+      </pc:sldChg>
+      <pc:sldChg chg="addSp modSp new mod">
+        <pc:chgData name="Utkarsh Agarwal" userId="7a1216fa42ee05d0" providerId="LiveId" clId="{5A8ABE04-300D-46CD-9942-40B59078845C}" dt="2026-02-05T01:54:59.248" v="66" actId="1076"/>
+        <pc:sldMkLst>
+          <pc:docMk/>
+          <pc:sldMk cId="1289078834" sldId="277"/>
+        </pc:sldMkLst>
+        <pc:picChg chg="add mod">
+          <ac:chgData name="Utkarsh Agarwal" userId="7a1216fa42ee05d0" providerId="LiveId" clId="{5A8ABE04-300D-46CD-9942-40B59078845C}" dt="2026-02-05T01:54:59.248" v="66" actId="1076"/>
+          <ac:picMkLst>
+            <pc:docMk/>
+            <pc:sldMk cId="1289078834" sldId="277"/>
+            <ac:picMk id="5" creationId="{33A2529C-AE7E-3718-945D-AEF24F9D4112}"/>
+          </ac:picMkLst>
+        </pc:picChg>
+      </pc:sldChg>
     </pc:docChg>
   </pc:docChgLst>
 </pc:chgInfo>
@@ -409,7 +528,7 @@
           <a:p>
             <a:fld id="{80E1994F-3A96-4BFC-9935-A0F2A58A4CCE}" type="datetimeFigureOut">
               <a:rPr lang="en-IN" smtClean="0"/>
-              <a:t>22-01-2026</a:t>
+              <a:t>05-02-2026</a:t>
             </a:fld>
             <a:endParaRPr lang="en-IN"/>
           </a:p>
@@ -609,7 +728,7 @@
           <a:p>
             <a:fld id="{80E1994F-3A96-4BFC-9935-A0F2A58A4CCE}" type="datetimeFigureOut">
               <a:rPr lang="en-IN" smtClean="0"/>
-              <a:t>22-01-2026</a:t>
+              <a:t>05-02-2026</a:t>
             </a:fld>
             <a:endParaRPr lang="en-IN"/>
           </a:p>
@@ -819,7 +938,7 @@
           <a:p>
             <a:fld id="{80E1994F-3A96-4BFC-9935-A0F2A58A4CCE}" type="datetimeFigureOut">
               <a:rPr lang="en-IN" smtClean="0"/>
-              <a:t>22-01-2026</a:t>
+              <a:t>05-02-2026</a:t>
             </a:fld>
             <a:endParaRPr lang="en-IN"/>
           </a:p>
@@ -1019,7 +1138,7 @@
           <a:p>
             <a:fld id="{80E1994F-3A96-4BFC-9935-A0F2A58A4CCE}" type="datetimeFigureOut">
               <a:rPr lang="en-IN" smtClean="0"/>
-              <a:t>22-01-2026</a:t>
+              <a:t>05-02-2026</a:t>
             </a:fld>
             <a:endParaRPr lang="en-IN"/>
           </a:p>
@@ -1295,7 +1414,7 @@
           <a:p>
             <a:fld id="{80E1994F-3A96-4BFC-9935-A0F2A58A4CCE}" type="datetimeFigureOut">
               <a:rPr lang="en-IN" smtClean="0"/>
-              <a:t>22-01-2026</a:t>
+              <a:t>05-02-2026</a:t>
             </a:fld>
             <a:endParaRPr lang="en-IN"/>
           </a:p>
@@ -1563,7 +1682,7 @@
           <a:p>
             <a:fld id="{80E1994F-3A96-4BFC-9935-A0F2A58A4CCE}" type="datetimeFigureOut">
               <a:rPr lang="en-IN" smtClean="0"/>
-              <a:t>22-01-2026</a:t>
+              <a:t>05-02-2026</a:t>
             </a:fld>
             <a:endParaRPr lang="en-IN"/>
           </a:p>
@@ -1978,7 +2097,7 @@
           <a:p>
             <a:fld id="{80E1994F-3A96-4BFC-9935-A0F2A58A4CCE}" type="datetimeFigureOut">
               <a:rPr lang="en-IN" smtClean="0"/>
-              <a:t>22-01-2026</a:t>
+              <a:t>05-02-2026</a:t>
             </a:fld>
             <a:endParaRPr lang="en-IN"/>
           </a:p>
@@ -2120,7 +2239,7 @@
           <a:p>
             <a:fld id="{80E1994F-3A96-4BFC-9935-A0F2A58A4CCE}" type="datetimeFigureOut">
               <a:rPr lang="en-IN" smtClean="0"/>
-              <a:t>22-01-2026</a:t>
+              <a:t>05-02-2026</a:t>
             </a:fld>
             <a:endParaRPr lang="en-IN"/>
           </a:p>
@@ -2233,7 +2352,7 @@
           <a:p>
             <a:fld id="{80E1994F-3A96-4BFC-9935-A0F2A58A4CCE}" type="datetimeFigureOut">
               <a:rPr lang="en-IN" smtClean="0"/>
-              <a:t>22-01-2026</a:t>
+              <a:t>05-02-2026</a:t>
             </a:fld>
             <a:endParaRPr lang="en-IN"/>
           </a:p>
@@ -2546,7 +2665,7 @@
           <a:p>
             <a:fld id="{80E1994F-3A96-4BFC-9935-A0F2A58A4CCE}" type="datetimeFigureOut">
               <a:rPr lang="en-IN" smtClean="0"/>
-              <a:t>22-01-2026</a:t>
+              <a:t>05-02-2026</a:t>
             </a:fld>
             <a:endParaRPr lang="en-IN"/>
           </a:p>
@@ -2835,7 +2954,7 @@
           <a:p>
             <a:fld id="{80E1994F-3A96-4BFC-9935-A0F2A58A4CCE}" type="datetimeFigureOut">
               <a:rPr lang="en-IN" smtClean="0"/>
-              <a:t>22-01-2026</a:t>
+              <a:t>05-02-2026</a:t>
             </a:fld>
             <a:endParaRPr lang="en-IN"/>
           </a:p>
@@ -3078,7 +3197,7 @@
           <a:p>
             <a:fld id="{80E1994F-3A96-4BFC-9935-A0F2A58A4CCE}" type="datetimeFigureOut">
               <a:rPr lang="en-IN" smtClean="0"/>
-              <a:t>22-01-2026</a:t>
+              <a:t>05-02-2026</a:t>
             </a:fld>
             <a:endParaRPr lang="en-IN"/>
           </a:p>
@@ -4248,6 +4367,446 @@
 </p:sld>
 </file>
 
+<file path=ppt/slides/slide16.xml><?xml version="1.0" encoding="utf-8"?>
+<p:sld xmlns:a="http://schemas.openxmlformats.org/drawingml/2006/main" xmlns:r="http://schemas.openxmlformats.org/officeDocument/2006/relationships" xmlns:p="http://schemas.openxmlformats.org/presentationml/2006/main">
+  <p:cSld>
+    <p:spTree>
+      <p:nvGrpSpPr>
+        <p:cNvPr id="1" name=""/>
+        <p:cNvGrpSpPr/>
+        <p:nvPr/>
+      </p:nvGrpSpPr>
+      <p:grpSpPr>
+        <a:xfrm>
+          <a:off x="0" y="0"/>
+          <a:ext cx="0" cy="0"/>
+          <a:chOff x="0" y="0"/>
+          <a:chExt cx="0" cy="0"/>
+        </a:xfrm>
+      </p:grpSpPr>
+      <p:sp>
+        <p:nvSpPr>
+          <p:cNvPr id="2" name="Title 1">
+            <a:extLst>
+              <a:ext uri="{FF2B5EF4-FFF2-40B4-BE49-F238E27FC236}">
+                <a16:creationId xmlns:a16="http://schemas.microsoft.com/office/drawing/2014/main" id="{17DC6625-3906-281E-1EC3-AE5FED7D23A1}"/>
+              </a:ext>
+            </a:extLst>
+          </p:cNvPr>
+          <p:cNvSpPr>
+            <a:spLocks noGrp="1"/>
+          </p:cNvSpPr>
+          <p:nvPr>
+            <p:ph type="title"/>
+          </p:nvPr>
+        </p:nvSpPr>
+        <p:spPr/>
+        <p:txBody>
+          <a:bodyPr/>
+          <a:lstStyle/>
+          <a:p>
+            <a:endParaRPr lang="en-IN"/>
+          </a:p>
+        </p:txBody>
+      </p:sp>
+      <p:sp>
+        <p:nvSpPr>
+          <p:cNvPr id="3" name="Content Placeholder 2">
+            <a:extLst>
+              <a:ext uri="{FF2B5EF4-FFF2-40B4-BE49-F238E27FC236}">
+                <a16:creationId xmlns:a16="http://schemas.microsoft.com/office/drawing/2014/main" id="{6BAFF189-773E-87FC-3A36-CBF2A13EBF9A}"/>
+              </a:ext>
+            </a:extLst>
+          </p:cNvPr>
+          <p:cNvSpPr>
+            <a:spLocks noGrp="1"/>
+          </p:cNvSpPr>
+          <p:nvPr>
+            <p:ph idx="1"/>
+          </p:nvPr>
+        </p:nvSpPr>
+        <p:spPr/>
+        <p:txBody>
+          <a:bodyPr/>
+          <a:lstStyle/>
+          <a:p>
+            <a:endParaRPr lang="en-IN"/>
+          </a:p>
+        </p:txBody>
+      </p:sp>
+      <p:pic>
+        <p:nvPicPr>
+          <p:cNvPr id="5" name="Picture 4">
+            <a:extLst>
+              <a:ext uri="{FF2B5EF4-FFF2-40B4-BE49-F238E27FC236}">
+                <a16:creationId xmlns:a16="http://schemas.microsoft.com/office/drawing/2014/main" id="{1C4B4A27-4382-C4B6-D947-025708AB7DFA}"/>
+              </a:ext>
+            </a:extLst>
+          </p:cNvPr>
+          <p:cNvPicPr>
+            <a:picLocks noChangeAspect="1"/>
+          </p:cNvPicPr>
+          <p:nvPr/>
+        </p:nvPicPr>
+        <p:blipFill>
+          <a:blip r:embed="rId2"/>
+          <a:stretch>
+            <a:fillRect/>
+          </a:stretch>
+        </p:blipFill>
+        <p:spPr>
+          <a:xfrm>
+            <a:off x="0" y="737024"/>
+            <a:ext cx="12192000" cy="5383952"/>
+          </a:xfrm>
+          <a:prstGeom prst="rect">
+            <a:avLst/>
+          </a:prstGeom>
+        </p:spPr>
+      </p:pic>
+    </p:spTree>
+    <p:extLst>
+      <p:ext uri="{BB962C8B-B14F-4D97-AF65-F5344CB8AC3E}">
+        <p14:creationId xmlns:p14="http://schemas.microsoft.com/office/powerpoint/2010/main" val="2330140429"/>
+      </p:ext>
+    </p:extLst>
+  </p:cSld>
+  <p:clrMapOvr>
+    <a:masterClrMapping/>
+  </p:clrMapOvr>
+</p:sld>
+</file>
+
+<file path=ppt/slides/slide17.xml><?xml version="1.0" encoding="utf-8"?>
+<p:sld xmlns:a="http://schemas.openxmlformats.org/drawingml/2006/main" xmlns:r="http://schemas.openxmlformats.org/officeDocument/2006/relationships" xmlns:p="http://schemas.openxmlformats.org/presentationml/2006/main">
+  <p:cSld>
+    <p:spTree>
+      <p:nvGrpSpPr>
+        <p:cNvPr id="1" name=""/>
+        <p:cNvGrpSpPr/>
+        <p:nvPr/>
+      </p:nvGrpSpPr>
+      <p:grpSpPr>
+        <a:xfrm>
+          <a:off x="0" y="0"/>
+          <a:ext cx="0" cy="0"/>
+          <a:chOff x="0" y="0"/>
+          <a:chExt cx="0" cy="0"/>
+        </a:xfrm>
+      </p:grpSpPr>
+      <p:sp>
+        <p:nvSpPr>
+          <p:cNvPr id="2" name="Title 1">
+            <a:extLst>
+              <a:ext uri="{FF2B5EF4-FFF2-40B4-BE49-F238E27FC236}">
+                <a16:creationId xmlns:a16="http://schemas.microsoft.com/office/drawing/2014/main" id="{D1DA6A92-13D1-728D-9EEF-EA25F9941E80}"/>
+              </a:ext>
+            </a:extLst>
+          </p:cNvPr>
+          <p:cNvSpPr>
+            <a:spLocks noGrp="1"/>
+          </p:cNvSpPr>
+          <p:nvPr>
+            <p:ph type="title"/>
+          </p:nvPr>
+        </p:nvSpPr>
+        <p:spPr/>
+        <p:txBody>
+          <a:bodyPr/>
+          <a:lstStyle/>
+          <a:p>
+            <a:endParaRPr lang="en-IN"/>
+          </a:p>
+        </p:txBody>
+      </p:sp>
+      <p:sp>
+        <p:nvSpPr>
+          <p:cNvPr id="3" name="Content Placeholder 2">
+            <a:extLst>
+              <a:ext uri="{FF2B5EF4-FFF2-40B4-BE49-F238E27FC236}">
+                <a16:creationId xmlns:a16="http://schemas.microsoft.com/office/drawing/2014/main" id="{909C94BC-1338-8197-31DA-951F0527648B}"/>
+              </a:ext>
+            </a:extLst>
+          </p:cNvPr>
+          <p:cNvSpPr>
+            <a:spLocks noGrp="1"/>
+          </p:cNvSpPr>
+          <p:nvPr>
+            <p:ph idx="1"/>
+          </p:nvPr>
+        </p:nvSpPr>
+        <p:spPr/>
+        <p:txBody>
+          <a:bodyPr/>
+          <a:lstStyle/>
+          <a:p>
+            <a:endParaRPr lang="en-IN"/>
+          </a:p>
+        </p:txBody>
+      </p:sp>
+      <p:pic>
+        <p:nvPicPr>
+          <p:cNvPr id="5" name="Picture 4">
+            <a:extLst>
+              <a:ext uri="{FF2B5EF4-FFF2-40B4-BE49-F238E27FC236}">
+                <a16:creationId xmlns:a16="http://schemas.microsoft.com/office/drawing/2014/main" id="{1B0A50CB-9BF8-9996-9D42-CD8220A77A6A}"/>
+              </a:ext>
+            </a:extLst>
+          </p:cNvPr>
+          <p:cNvPicPr>
+            <a:picLocks noChangeAspect="1"/>
+          </p:cNvPicPr>
+          <p:nvPr/>
+        </p:nvPicPr>
+        <p:blipFill>
+          <a:blip r:embed="rId2"/>
+          <a:stretch>
+            <a:fillRect/>
+          </a:stretch>
+        </p:blipFill>
+        <p:spPr>
+          <a:xfrm>
+            <a:off x="90118" y="1242129"/>
+            <a:ext cx="12011764" cy="4205492"/>
+          </a:xfrm>
+          <a:prstGeom prst="rect">
+            <a:avLst/>
+          </a:prstGeom>
+        </p:spPr>
+      </p:pic>
+    </p:spTree>
+    <p:extLst>
+      <p:ext uri="{BB962C8B-B14F-4D97-AF65-F5344CB8AC3E}">
+        <p14:creationId xmlns:p14="http://schemas.microsoft.com/office/powerpoint/2010/main" val="728988289"/>
+      </p:ext>
+    </p:extLst>
+  </p:cSld>
+  <p:clrMapOvr>
+    <a:masterClrMapping/>
+  </p:clrMapOvr>
+</p:sld>
+</file>
+
+<file path=ppt/slides/slide18.xml><?xml version="1.0" encoding="utf-8"?>
+<p:sld xmlns:a="http://schemas.openxmlformats.org/drawingml/2006/main" xmlns:r="http://schemas.openxmlformats.org/officeDocument/2006/relationships" xmlns:p="http://schemas.openxmlformats.org/presentationml/2006/main">
+  <p:cSld>
+    <p:spTree>
+      <p:nvGrpSpPr>
+        <p:cNvPr id="1" name=""/>
+        <p:cNvGrpSpPr/>
+        <p:nvPr/>
+      </p:nvGrpSpPr>
+      <p:grpSpPr>
+        <a:xfrm>
+          <a:off x="0" y="0"/>
+          <a:ext cx="0" cy="0"/>
+          <a:chOff x="0" y="0"/>
+          <a:chExt cx="0" cy="0"/>
+        </a:xfrm>
+      </p:grpSpPr>
+      <p:sp>
+        <p:nvSpPr>
+          <p:cNvPr id="2" name="Title 1">
+            <a:extLst>
+              <a:ext uri="{FF2B5EF4-FFF2-40B4-BE49-F238E27FC236}">
+                <a16:creationId xmlns:a16="http://schemas.microsoft.com/office/drawing/2014/main" id="{F7D79256-53D9-9AF7-C02D-0E27508DEDDB}"/>
+              </a:ext>
+            </a:extLst>
+          </p:cNvPr>
+          <p:cNvSpPr>
+            <a:spLocks noGrp="1"/>
+          </p:cNvSpPr>
+          <p:nvPr>
+            <p:ph type="title"/>
+          </p:nvPr>
+        </p:nvSpPr>
+        <p:spPr/>
+        <p:txBody>
+          <a:bodyPr/>
+          <a:lstStyle/>
+          <a:p>
+            <a:endParaRPr lang="en-IN"/>
+          </a:p>
+        </p:txBody>
+      </p:sp>
+      <p:sp>
+        <p:nvSpPr>
+          <p:cNvPr id="3" name="Content Placeholder 2">
+            <a:extLst>
+              <a:ext uri="{FF2B5EF4-FFF2-40B4-BE49-F238E27FC236}">
+                <a16:creationId xmlns:a16="http://schemas.microsoft.com/office/drawing/2014/main" id="{989F5203-E910-C669-3D9E-43AB808A332B}"/>
+              </a:ext>
+            </a:extLst>
+          </p:cNvPr>
+          <p:cNvSpPr>
+            <a:spLocks noGrp="1"/>
+          </p:cNvSpPr>
+          <p:nvPr>
+            <p:ph idx="1"/>
+          </p:nvPr>
+        </p:nvSpPr>
+        <p:spPr/>
+        <p:txBody>
+          <a:bodyPr/>
+          <a:lstStyle/>
+          <a:p>
+            <a:endParaRPr lang="en-IN"/>
+          </a:p>
+        </p:txBody>
+      </p:sp>
+      <p:pic>
+        <p:nvPicPr>
+          <p:cNvPr id="5" name="Picture 4">
+            <a:extLst>
+              <a:ext uri="{FF2B5EF4-FFF2-40B4-BE49-F238E27FC236}">
+                <a16:creationId xmlns:a16="http://schemas.microsoft.com/office/drawing/2014/main" id="{F860726A-CD0C-B818-EB80-D34153235C57}"/>
+              </a:ext>
+            </a:extLst>
+          </p:cNvPr>
+          <p:cNvPicPr>
+            <a:picLocks noChangeAspect="1"/>
+          </p:cNvPicPr>
+          <p:nvPr/>
+        </p:nvPicPr>
+        <p:blipFill>
+          <a:blip r:embed="rId2"/>
+          <a:stretch>
+            <a:fillRect/>
+          </a:stretch>
+        </p:blipFill>
+        <p:spPr>
+          <a:xfrm>
+            <a:off x="130673" y="1336100"/>
+            <a:ext cx="11930653" cy="4536063"/>
+          </a:xfrm>
+          <a:prstGeom prst="rect">
+            <a:avLst/>
+          </a:prstGeom>
+        </p:spPr>
+      </p:pic>
+    </p:spTree>
+    <p:extLst>
+      <p:ext uri="{BB962C8B-B14F-4D97-AF65-F5344CB8AC3E}">
+        <p14:creationId xmlns:p14="http://schemas.microsoft.com/office/powerpoint/2010/main" val="2384102187"/>
+      </p:ext>
+    </p:extLst>
+  </p:cSld>
+  <p:clrMapOvr>
+    <a:masterClrMapping/>
+  </p:clrMapOvr>
+</p:sld>
+</file>
+
+<file path=ppt/slides/slide19.xml><?xml version="1.0" encoding="utf-8"?>
+<p:sld xmlns:a="http://schemas.openxmlformats.org/drawingml/2006/main" xmlns:r="http://schemas.openxmlformats.org/officeDocument/2006/relationships" xmlns:p="http://schemas.openxmlformats.org/presentationml/2006/main">
+  <p:cSld>
+    <p:spTree>
+      <p:nvGrpSpPr>
+        <p:cNvPr id="1" name=""/>
+        <p:cNvGrpSpPr/>
+        <p:nvPr/>
+      </p:nvGrpSpPr>
+      <p:grpSpPr>
+        <a:xfrm>
+          <a:off x="0" y="0"/>
+          <a:ext cx="0" cy="0"/>
+          <a:chOff x="0" y="0"/>
+          <a:chExt cx="0" cy="0"/>
+        </a:xfrm>
+      </p:grpSpPr>
+      <p:sp>
+        <p:nvSpPr>
+          <p:cNvPr id="2" name="Title 1">
+            <a:extLst>
+              <a:ext uri="{FF2B5EF4-FFF2-40B4-BE49-F238E27FC236}">
+                <a16:creationId xmlns:a16="http://schemas.microsoft.com/office/drawing/2014/main" id="{F2CB4586-2945-7B61-489C-BDE143F4E13B}"/>
+              </a:ext>
+            </a:extLst>
+          </p:cNvPr>
+          <p:cNvSpPr>
+            <a:spLocks noGrp="1"/>
+          </p:cNvSpPr>
+          <p:nvPr>
+            <p:ph type="title"/>
+          </p:nvPr>
+        </p:nvSpPr>
+        <p:spPr/>
+        <p:txBody>
+          <a:bodyPr/>
+          <a:lstStyle/>
+          <a:p>
+            <a:endParaRPr lang="en-IN"/>
+          </a:p>
+        </p:txBody>
+      </p:sp>
+      <p:sp>
+        <p:nvSpPr>
+          <p:cNvPr id="3" name="Content Placeholder 2">
+            <a:extLst>
+              <a:ext uri="{FF2B5EF4-FFF2-40B4-BE49-F238E27FC236}">
+                <a16:creationId xmlns:a16="http://schemas.microsoft.com/office/drawing/2014/main" id="{41C54573-98F1-B95B-F410-698970033A11}"/>
+              </a:ext>
+            </a:extLst>
+          </p:cNvPr>
+          <p:cNvSpPr>
+            <a:spLocks noGrp="1"/>
+          </p:cNvSpPr>
+          <p:nvPr>
+            <p:ph idx="1"/>
+          </p:nvPr>
+        </p:nvSpPr>
+        <p:spPr/>
+        <p:txBody>
+          <a:bodyPr/>
+          <a:lstStyle/>
+          <a:p>
+            <a:endParaRPr lang="en-IN"/>
+          </a:p>
+        </p:txBody>
+      </p:sp>
+      <p:pic>
+        <p:nvPicPr>
+          <p:cNvPr id="5" name="Picture 4">
+            <a:extLst>
+              <a:ext uri="{FF2B5EF4-FFF2-40B4-BE49-F238E27FC236}">
+                <a16:creationId xmlns:a16="http://schemas.microsoft.com/office/drawing/2014/main" id="{5FED6630-DADE-B57B-F0DB-7AD34308404E}"/>
+              </a:ext>
+            </a:extLst>
+          </p:cNvPr>
+          <p:cNvPicPr>
+            <a:picLocks noChangeAspect="1"/>
+          </p:cNvPicPr>
+          <p:nvPr/>
+        </p:nvPicPr>
+        <p:blipFill>
+          <a:blip r:embed="rId2"/>
+          <a:stretch>
+            <a:fillRect/>
+          </a:stretch>
+        </p:blipFill>
+        <p:spPr>
+          <a:xfrm>
+            <a:off x="0" y="901570"/>
+            <a:ext cx="12192000" cy="5054860"/>
+          </a:xfrm>
+          <a:prstGeom prst="rect">
+            <a:avLst/>
+          </a:prstGeom>
+        </p:spPr>
+      </p:pic>
+    </p:spTree>
+    <p:extLst>
+      <p:ext uri="{BB962C8B-B14F-4D97-AF65-F5344CB8AC3E}">
+        <p14:creationId xmlns:p14="http://schemas.microsoft.com/office/powerpoint/2010/main" val="2858694303"/>
+      </p:ext>
+    </p:extLst>
+  </p:cSld>
+  <p:clrMapOvr>
+    <a:masterClrMapping/>
+  </p:clrMapOvr>
+</p:sld>
+</file>
+
 <file path=ppt/slides/slide2.xml><?xml version="1.0" encoding="utf-8"?>
 <p:sld xmlns:a="http://schemas.openxmlformats.org/drawingml/2006/main" xmlns:r="http://schemas.openxmlformats.org/officeDocument/2006/relationships" xmlns:p="http://schemas.openxmlformats.org/presentationml/2006/main">
   <p:cSld>
@@ -4349,6 +4908,336 @@
     <p:extLst>
       <p:ext uri="{BB962C8B-B14F-4D97-AF65-F5344CB8AC3E}">
         <p14:creationId xmlns:p14="http://schemas.microsoft.com/office/powerpoint/2010/main" val="3858386596"/>
+      </p:ext>
+    </p:extLst>
+  </p:cSld>
+  <p:clrMapOvr>
+    <a:masterClrMapping/>
+  </p:clrMapOvr>
+</p:sld>
+</file>
+
+<file path=ppt/slides/slide20.xml><?xml version="1.0" encoding="utf-8"?>
+<p:sld xmlns:a="http://schemas.openxmlformats.org/drawingml/2006/main" xmlns:r="http://schemas.openxmlformats.org/officeDocument/2006/relationships" xmlns:p="http://schemas.openxmlformats.org/presentationml/2006/main">
+  <p:cSld>
+    <p:spTree>
+      <p:nvGrpSpPr>
+        <p:cNvPr id="1" name=""/>
+        <p:cNvGrpSpPr/>
+        <p:nvPr/>
+      </p:nvGrpSpPr>
+      <p:grpSpPr>
+        <a:xfrm>
+          <a:off x="0" y="0"/>
+          <a:ext cx="0" cy="0"/>
+          <a:chOff x="0" y="0"/>
+          <a:chExt cx="0" cy="0"/>
+        </a:xfrm>
+      </p:grpSpPr>
+      <p:sp>
+        <p:nvSpPr>
+          <p:cNvPr id="2" name="Title 1">
+            <a:extLst>
+              <a:ext uri="{FF2B5EF4-FFF2-40B4-BE49-F238E27FC236}">
+                <a16:creationId xmlns:a16="http://schemas.microsoft.com/office/drawing/2014/main" id="{D33DA0E3-ADE6-4EDF-1586-D736142084AE}"/>
+              </a:ext>
+            </a:extLst>
+          </p:cNvPr>
+          <p:cNvSpPr>
+            <a:spLocks noGrp="1"/>
+          </p:cNvSpPr>
+          <p:nvPr>
+            <p:ph type="title"/>
+          </p:nvPr>
+        </p:nvSpPr>
+        <p:spPr/>
+        <p:txBody>
+          <a:bodyPr/>
+          <a:lstStyle/>
+          <a:p>
+            <a:endParaRPr lang="en-IN"/>
+          </a:p>
+        </p:txBody>
+      </p:sp>
+      <p:sp>
+        <p:nvSpPr>
+          <p:cNvPr id="3" name="Content Placeholder 2">
+            <a:extLst>
+              <a:ext uri="{FF2B5EF4-FFF2-40B4-BE49-F238E27FC236}">
+                <a16:creationId xmlns:a16="http://schemas.microsoft.com/office/drawing/2014/main" id="{45C5B3C1-597C-2FEE-462C-5D4F31FB5E85}"/>
+              </a:ext>
+            </a:extLst>
+          </p:cNvPr>
+          <p:cNvSpPr>
+            <a:spLocks noGrp="1"/>
+          </p:cNvSpPr>
+          <p:nvPr>
+            <p:ph idx="1"/>
+          </p:nvPr>
+        </p:nvSpPr>
+        <p:spPr/>
+        <p:txBody>
+          <a:bodyPr/>
+          <a:lstStyle/>
+          <a:p>
+            <a:endParaRPr lang="en-IN"/>
+          </a:p>
+        </p:txBody>
+      </p:sp>
+      <p:pic>
+        <p:nvPicPr>
+          <p:cNvPr id="5" name="Picture 4">
+            <a:extLst>
+              <a:ext uri="{FF2B5EF4-FFF2-40B4-BE49-F238E27FC236}">
+                <a16:creationId xmlns:a16="http://schemas.microsoft.com/office/drawing/2014/main" id="{0C9EC71D-0F60-EE00-29A2-52337EECFAF9}"/>
+              </a:ext>
+            </a:extLst>
+          </p:cNvPr>
+          <p:cNvPicPr>
+            <a:picLocks noChangeAspect="1"/>
+          </p:cNvPicPr>
+          <p:nvPr/>
+        </p:nvPicPr>
+        <p:blipFill>
+          <a:blip r:embed="rId2"/>
+          <a:stretch>
+            <a:fillRect/>
+          </a:stretch>
+        </p:blipFill>
+        <p:spPr>
+          <a:xfrm>
+            <a:off x="106831" y="1495714"/>
+            <a:ext cx="11978338" cy="4049877"/>
+          </a:xfrm>
+          <a:prstGeom prst="rect">
+            <a:avLst/>
+          </a:prstGeom>
+        </p:spPr>
+      </p:pic>
+    </p:spTree>
+    <p:extLst>
+      <p:ext uri="{BB962C8B-B14F-4D97-AF65-F5344CB8AC3E}">
+        <p14:creationId xmlns:p14="http://schemas.microsoft.com/office/powerpoint/2010/main" val="46837287"/>
+      </p:ext>
+    </p:extLst>
+  </p:cSld>
+  <p:clrMapOvr>
+    <a:masterClrMapping/>
+  </p:clrMapOvr>
+</p:sld>
+</file>
+
+<file path=ppt/slides/slide21.xml><?xml version="1.0" encoding="utf-8"?>
+<p:sld xmlns:a="http://schemas.openxmlformats.org/drawingml/2006/main" xmlns:r="http://schemas.openxmlformats.org/officeDocument/2006/relationships" xmlns:p="http://schemas.openxmlformats.org/presentationml/2006/main">
+  <p:cSld>
+    <p:spTree>
+      <p:nvGrpSpPr>
+        <p:cNvPr id="1" name=""/>
+        <p:cNvGrpSpPr/>
+        <p:nvPr/>
+      </p:nvGrpSpPr>
+      <p:grpSpPr>
+        <a:xfrm>
+          <a:off x="0" y="0"/>
+          <a:ext cx="0" cy="0"/>
+          <a:chOff x="0" y="0"/>
+          <a:chExt cx="0" cy="0"/>
+        </a:xfrm>
+      </p:grpSpPr>
+      <p:sp>
+        <p:nvSpPr>
+          <p:cNvPr id="2" name="Title 1">
+            <a:extLst>
+              <a:ext uri="{FF2B5EF4-FFF2-40B4-BE49-F238E27FC236}">
+                <a16:creationId xmlns:a16="http://schemas.microsoft.com/office/drawing/2014/main" id="{97CF3867-842B-A5F0-FC29-7F8E7895D0D8}"/>
+              </a:ext>
+            </a:extLst>
+          </p:cNvPr>
+          <p:cNvSpPr>
+            <a:spLocks noGrp="1"/>
+          </p:cNvSpPr>
+          <p:nvPr>
+            <p:ph type="title"/>
+          </p:nvPr>
+        </p:nvSpPr>
+        <p:spPr/>
+        <p:txBody>
+          <a:bodyPr/>
+          <a:lstStyle/>
+          <a:p>
+            <a:endParaRPr lang="en-IN"/>
+          </a:p>
+        </p:txBody>
+      </p:sp>
+      <p:sp>
+        <p:nvSpPr>
+          <p:cNvPr id="3" name="Content Placeholder 2">
+            <a:extLst>
+              <a:ext uri="{FF2B5EF4-FFF2-40B4-BE49-F238E27FC236}">
+                <a16:creationId xmlns:a16="http://schemas.microsoft.com/office/drawing/2014/main" id="{C4D784E6-0EE6-8875-860D-B4AAC4A80BB5}"/>
+              </a:ext>
+            </a:extLst>
+          </p:cNvPr>
+          <p:cNvSpPr>
+            <a:spLocks noGrp="1"/>
+          </p:cNvSpPr>
+          <p:nvPr>
+            <p:ph idx="1"/>
+          </p:nvPr>
+        </p:nvSpPr>
+        <p:spPr/>
+        <p:txBody>
+          <a:bodyPr/>
+          <a:lstStyle/>
+          <a:p>
+            <a:endParaRPr lang="en-IN"/>
+          </a:p>
+        </p:txBody>
+      </p:sp>
+      <p:pic>
+        <p:nvPicPr>
+          <p:cNvPr id="5" name="Picture 4">
+            <a:extLst>
+              <a:ext uri="{FF2B5EF4-FFF2-40B4-BE49-F238E27FC236}">
+                <a16:creationId xmlns:a16="http://schemas.microsoft.com/office/drawing/2014/main" id="{2C4634BF-7D5A-3568-2C69-C8E938EDA442}"/>
+              </a:ext>
+            </a:extLst>
+          </p:cNvPr>
+          <p:cNvPicPr>
+            <a:picLocks noChangeAspect="1"/>
+          </p:cNvPicPr>
+          <p:nvPr/>
+        </p:nvPicPr>
+        <p:blipFill>
+          <a:blip r:embed="rId2"/>
+          <a:stretch>
+            <a:fillRect/>
+          </a:stretch>
+        </p:blipFill>
+        <p:spPr>
+          <a:xfrm>
+            <a:off x="-10742" y="1533093"/>
+            <a:ext cx="12202742" cy="3791813"/>
+          </a:xfrm>
+          <a:prstGeom prst="rect">
+            <a:avLst/>
+          </a:prstGeom>
+        </p:spPr>
+      </p:pic>
+    </p:spTree>
+    <p:extLst>
+      <p:ext uri="{BB962C8B-B14F-4D97-AF65-F5344CB8AC3E}">
+        <p14:creationId xmlns:p14="http://schemas.microsoft.com/office/powerpoint/2010/main" val="4021678318"/>
+      </p:ext>
+    </p:extLst>
+  </p:cSld>
+  <p:clrMapOvr>
+    <a:masterClrMapping/>
+  </p:clrMapOvr>
+</p:sld>
+</file>
+
+<file path=ppt/slides/slide22.xml><?xml version="1.0" encoding="utf-8"?>
+<p:sld xmlns:a="http://schemas.openxmlformats.org/drawingml/2006/main" xmlns:r="http://schemas.openxmlformats.org/officeDocument/2006/relationships" xmlns:p="http://schemas.openxmlformats.org/presentationml/2006/main">
+  <p:cSld>
+    <p:spTree>
+      <p:nvGrpSpPr>
+        <p:cNvPr id="1" name=""/>
+        <p:cNvGrpSpPr/>
+        <p:nvPr/>
+      </p:nvGrpSpPr>
+      <p:grpSpPr>
+        <a:xfrm>
+          <a:off x="0" y="0"/>
+          <a:ext cx="0" cy="0"/>
+          <a:chOff x="0" y="0"/>
+          <a:chExt cx="0" cy="0"/>
+        </a:xfrm>
+      </p:grpSpPr>
+      <p:sp>
+        <p:nvSpPr>
+          <p:cNvPr id="2" name="Title 1">
+            <a:extLst>
+              <a:ext uri="{FF2B5EF4-FFF2-40B4-BE49-F238E27FC236}">
+                <a16:creationId xmlns:a16="http://schemas.microsoft.com/office/drawing/2014/main" id="{BF8C9EB3-140E-CF81-6E5A-889176291128}"/>
+              </a:ext>
+            </a:extLst>
+          </p:cNvPr>
+          <p:cNvSpPr>
+            <a:spLocks noGrp="1"/>
+          </p:cNvSpPr>
+          <p:nvPr>
+            <p:ph type="title"/>
+          </p:nvPr>
+        </p:nvSpPr>
+        <p:spPr/>
+        <p:txBody>
+          <a:bodyPr/>
+          <a:lstStyle/>
+          <a:p>
+            <a:endParaRPr lang="en-IN"/>
+          </a:p>
+        </p:txBody>
+      </p:sp>
+      <p:sp>
+        <p:nvSpPr>
+          <p:cNvPr id="3" name="Content Placeholder 2">
+            <a:extLst>
+              <a:ext uri="{FF2B5EF4-FFF2-40B4-BE49-F238E27FC236}">
+                <a16:creationId xmlns:a16="http://schemas.microsoft.com/office/drawing/2014/main" id="{639077D1-88E9-A446-A949-CCB6D53B0A9A}"/>
+              </a:ext>
+            </a:extLst>
+          </p:cNvPr>
+          <p:cNvSpPr>
+            <a:spLocks noGrp="1"/>
+          </p:cNvSpPr>
+          <p:nvPr>
+            <p:ph idx="1"/>
+          </p:nvPr>
+        </p:nvSpPr>
+        <p:spPr/>
+        <p:txBody>
+          <a:bodyPr/>
+          <a:lstStyle/>
+          <a:p>
+            <a:endParaRPr lang="en-IN"/>
+          </a:p>
+        </p:txBody>
+      </p:sp>
+      <p:pic>
+        <p:nvPicPr>
+          <p:cNvPr id="5" name="Picture 4">
+            <a:extLst>
+              <a:ext uri="{FF2B5EF4-FFF2-40B4-BE49-F238E27FC236}">
+                <a16:creationId xmlns:a16="http://schemas.microsoft.com/office/drawing/2014/main" id="{33A2529C-AE7E-3718-945D-AEF24F9D4112}"/>
+              </a:ext>
+            </a:extLst>
+          </p:cNvPr>
+          <p:cNvPicPr>
+            <a:picLocks noChangeAspect="1"/>
+          </p:cNvPicPr>
+          <p:nvPr/>
+        </p:nvPicPr>
+        <p:blipFill>
+          <a:blip r:embed="rId2"/>
+          <a:stretch>
+            <a:fillRect/>
+          </a:stretch>
+        </p:blipFill>
+        <p:spPr>
+          <a:xfrm>
+            <a:off x="456114" y="1388502"/>
+            <a:ext cx="11279772" cy="4080996"/>
+          </a:xfrm>
+          <a:prstGeom prst="rect">
+            <a:avLst/>
+          </a:prstGeom>
+        </p:spPr>
+      </p:pic>
+    </p:spTree>
+    <p:extLst>
+      <p:ext uri="{BB962C8B-B14F-4D97-AF65-F5344CB8AC3E}">
+        <p14:creationId xmlns:p14="http://schemas.microsoft.com/office/powerpoint/2010/main" val="1289078834"/>
       </p:ext>
     </p:extLst>
   </p:cSld>

--- a/IV Sem/SCM/Git Basics.pptx
+++ b/IV Sem/SCM/Git Basics.pptx
@@ -27,6 +27,12 @@
     <p:sldId id="275" r:id="rId21"/>
     <p:sldId id="276" r:id="rId22"/>
     <p:sldId id="277" r:id="rId23"/>
+    <p:sldId id="278" r:id="rId24"/>
+    <p:sldId id="279" r:id="rId25"/>
+    <p:sldId id="280" r:id="rId26"/>
+    <p:sldId id="281" r:id="rId27"/>
+    <p:sldId id="282" r:id="rId28"/>
+    <p:sldId id="283" r:id="rId29"/>
   </p:sldIdLst>
   <p:sldSz cx="12192000" cy="6858000"/>
   <p:notesSz cx="6858000" cy="9144000"/>
@@ -138,7 +144,7 @@
   <pc:docChgLst>
     <pc:chgData name="Utkarsh Agarwal" userId="7a1216fa42ee05d0" providerId="LiveId" clId="{5A8ABE04-300D-46CD-9942-40B59078845C}"/>
     <pc:docChg chg="undo custSel addSld delSld modSld">
-      <pc:chgData name="Utkarsh Agarwal" userId="7a1216fa42ee05d0" providerId="LiveId" clId="{5A8ABE04-300D-46CD-9942-40B59078845C}" dt="2026-02-05T01:54:59.248" v="66" actId="1076"/>
+      <pc:chgData name="Utkarsh Agarwal" userId="7a1216fa42ee05d0" providerId="LiveId" clId="{5A8ABE04-300D-46CD-9942-40B59078845C}" dt="2026-02-08T12:06:14.857" v="78" actId="22"/>
       <pc:docMkLst>
         <pc:docMk/>
       </pc:docMkLst>
@@ -307,13 +313,6 @@
           </ac:picMkLst>
         </pc:picChg>
       </pc:sldChg>
-      <pc:sldChg chg="new del">
-        <pc:chgData name="Utkarsh Agarwal" userId="7a1216fa42ee05d0" providerId="LiveId" clId="{5A8ABE04-300D-46CD-9942-40B59078845C}" dt="2026-02-05T01:25:28.320" v="41" actId="680"/>
-        <pc:sldMkLst>
-          <pc:docMk/>
-          <pc:sldMk cId="4218539260" sldId="273"/>
-        </pc:sldMkLst>
-      </pc:sldChg>
       <pc:sldChg chg="addSp new mod">
         <pc:chgData name="Utkarsh Agarwal" userId="7a1216fa42ee05d0" providerId="LiveId" clId="{5A8ABE04-300D-46CD-9942-40B59078845C}" dt="2026-02-05T01:36:59.271" v="51" actId="22"/>
         <pc:sldMkLst>
@@ -374,6 +373,96 @@
           </ac:picMkLst>
         </pc:picChg>
       </pc:sldChg>
+      <pc:sldChg chg="addSp new mod">
+        <pc:chgData name="Utkarsh Agarwal" userId="7a1216fa42ee05d0" providerId="LiveId" clId="{5A8ABE04-300D-46CD-9942-40B59078845C}" dt="2026-02-08T12:00:18.616" v="68" actId="22"/>
+        <pc:sldMkLst>
+          <pc:docMk/>
+          <pc:sldMk cId="1899831343" sldId="278"/>
+        </pc:sldMkLst>
+        <pc:picChg chg="add">
+          <ac:chgData name="Utkarsh Agarwal" userId="7a1216fa42ee05d0" providerId="LiveId" clId="{5A8ABE04-300D-46CD-9942-40B59078845C}" dt="2026-02-08T12:00:18.616" v="68" actId="22"/>
+          <ac:picMkLst>
+            <pc:docMk/>
+            <pc:sldMk cId="1899831343" sldId="278"/>
+            <ac:picMk id="5" creationId="{3B28C9F4-A437-6C15-9752-1D217D91DA70}"/>
+          </ac:picMkLst>
+        </pc:picChg>
+      </pc:sldChg>
+      <pc:sldChg chg="addSp new mod">
+        <pc:chgData name="Utkarsh Agarwal" userId="7a1216fa42ee05d0" providerId="LiveId" clId="{5A8ABE04-300D-46CD-9942-40B59078845C}" dt="2026-02-08T12:00:53.741" v="70" actId="22"/>
+        <pc:sldMkLst>
+          <pc:docMk/>
+          <pc:sldMk cId="1182341619" sldId="279"/>
+        </pc:sldMkLst>
+        <pc:picChg chg="add">
+          <ac:chgData name="Utkarsh Agarwal" userId="7a1216fa42ee05d0" providerId="LiveId" clId="{5A8ABE04-300D-46CD-9942-40B59078845C}" dt="2026-02-08T12:00:53.741" v="70" actId="22"/>
+          <ac:picMkLst>
+            <pc:docMk/>
+            <pc:sldMk cId="1182341619" sldId="279"/>
+            <ac:picMk id="5" creationId="{685DEE11-1891-5846-64B9-D96D4DE9A588}"/>
+          </ac:picMkLst>
+        </pc:picChg>
+      </pc:sldChg>
+      <pc:sldChg chg="addSp new mod">
+        <pc:chgData name="Utkarsh Agarwal" userId="7a1216fa42ee05d0" providerId="LiveId" clId="{5A8ABE04-300D-46CD-9942-40B59078845C}" dt="2026-02-08T12:01:16.636" v="72" actId="22"/>
+        <pc:sldMkLst>
+          <pc:docMk/>
+          <pc:sldMk cId="1938700212" sldId="280"/>
+        </pc:sldMkLst>
+        <pc:picChg chg="add">
+          <ac:chgData name="Utkarsh Agarwal" userId="7a1216fa42ee05d0" providerId="LiveId" clId="{5A8ABE04-300D-46CD-9942-40B59078845C}" dt="2026-02-08T12:01:16.636" v="72" actId="22"/>
+          <ac:picMkLst>
+            <pc:docMk/>
+            <pc:sldMk cId="1938700212" sldId="280"/>
+            <ac:picMk id="5" creationId="{21859AFF-E334-55BA-6765-CEF2C995AD00}"/>
+          </ac:picMkLst>
+        </pc:picChg>
+      </pc:sldChg>
+      <pc:sldChg chg="addSp new mod">
+        <pc:chgData name="Utkarsh Agarwal" userId="7a1216fa42ee05d0" providerId="LiveId" clId="{5A8ABE04-300D-46CD-9942-40B59078845C}" dt="2026-02-08T12:01:42.425" v="74" actId="22"/>
+        <pc:sldMkLst>
+          <pc:docMk/>
+          <pc:sldMk cId="1595278338" sldId="281"/>
+        </pc:sldMkLst>
+        <pc:picChg chg="add">
+          <ac:chgData name="Utkarsh Agarwal" userId="7a1216fa42ee05d0" providerId="LiveId" clId="{5A8ABE04-300D-46CD-9942-40B59078845C}" dt="2026-02-08T12:01:42.425" v="74" actId="22"/>
+          <ac:picMkLst>
+            <pc:docMk/>
+            <pc:sldMk cId="1595278338" sldId="281"/>
+            <ac:picMk id="5" creationId="{96FF3784-3336-8589-35EC-296669B344C3}"/>
+          </ac:picMkLst>
+        </pc:picChg>
+      </pc:sldChg>
+      <pc:sldChg chg="addSp new mod">
+        <pc:chgData name="Utkarsh Agarwal" userId="7a1216fa42ee05d0" providerId="LiveId" clId="{5A8ABE04-300D-46CD-9942-40B59078845C}" dt="2026-02-08T12:05:44.782" v="76" actId="22"/>
+        <pc:sldMkLst>
+          <pc:docMk/>
+          <pc:sldMk cId="218769065" sldId="282"/>
+        </pc:sldMkLst>
+        <pc:picChg chg="add">
+          <ac:chgData name="Utkarsh Agarwal" userId="7a1216fa42ee05d0" providerId="LiveId" clId="{5A8ABE04-300D-46CD-9942-40B59078845C}" dt="2026-02-08T12:05:44.782" v="76" actId="22"/>
+          <ac:picMkLst>
+            <pc:docMk/>
+            <pc:sldMk cId="218769065" sldId="282"/>
+            <ac:picMk id="5" creationId="{04675D54-393E-4C90-8132-B4F837CEE379}"/>
+          </ac:picMkLst>
+        </pc:picChg>
+      </pc:sldChg>
+      <pc:sldChg chg="addSp new mod">
+        <pc:chgData name="Utkarsh Agarwal" userId="7a1216fa42ee05d0" providerId="LiveId" clId="{5A8ABE04-300D-46CD-9942-40B59078845C}" dt="2026-02-08T12:06:14.857" v="78" actId="22"/>
+        <pc:sldMkLst>
+          <pc:docMk/>
+          <pc:sldMk cId="3289320709" sldId="283"/>
+        </pc:sldMkLst>
+        <pc:picChg chg="add">
+          <ac:chgData name="Utkarsh Agarwal" userId="7a1216fa42ee05d0" providerId="LiveId" clId="{5A8ABE04-300D-46CD-9942-40B59078845C}" dt="2026-02-08T12:06:14.857" v="78" actId="22"/>
+          <ac:picMkLst>
+            <pc:docMk/>
+            <pc:sldMk cId="3289320709" sldId="283"/>
+            <ac:picMk id="5" creationId="{F22616FF-09D7-F918-3C20-4772750140E4}"/>
+          </ac:picMkLst>
+        </pc:picChg>
+      </pc:sldChg>
     </pc:docChg>
   </pc:docChgLst>
 </pc:chgInfo>
@@ -528,7 +617,7 @@
           <a:p>
             <a:fld id="{80E1994F-3A96-4BFC-9935-A0F2A58A4CCE}" type="datetimeFigureOut">
               <a:rPr lang="en-IN" smtClean="0"/>
-              <a:t>05-02-2026</a:t>
+              <a:t>08-02-2026</a:t>
             </a:fld>
             <a:endParaRPr lang="en-IN"/>
           </a:p>
@@ -728,7 +817,7 @@
           <a:p>
             <a:fld id="{80E1994F-3A96-4BFC-9935-A0F2A58A4CCE}" type="datetimeFigureOut">
               <a:rPr lang="en-IN" smtClean="0"/>
-              <a:t>05-02-2026</a:t>
+              <a:t>08-02-2026</a:t>
             </a:fld>
             <a:endParaRPr lang="en-IN"/>
           </a:p>
@@ -938,7 +1027,7 @@
           <a:p>
             <a:fld id="{80E1994F-3A96-4BFC-9935-A0F2A58A4CCE}" type="datetimeFigureOut">
               <a:rPr lang="en-IN" smtClean="0"/>
-              <a:t>05-02-2026</a:t>
+              <a:t>08-02-2026</a:t>
             </a:fld>
             <a:endParaRPr lang="en-IN"/>
           </a:p>
@@ -1138,7 +1227,7 @@
           <a:p>
             <a:fld id="{80E1994F-3A96-4BFC-9935-A0F2A58A4CCE}" type="datetimeFigureOut">
               <a:rPr lang="en-IN" smtClean="0"/>
-              <a:t>05-02-2026</a:t>
+              <a:t>08-02-2026</a:t>
             </a:fld>
             <a:endParaRPr lang="en-IN"/>
           </a:p>
@@ -1414,7 +1503,7 @@
           <a:p>
             <a:fld id="{80E1994F-3A96-4BFC-9935-A0F2A58A4CCE}" type="datetimeFigureOut">
               <a:rPr lang="en-IN" smtClean="0"/>
-              <a:t>05-02-2026</a:t>
+              <a:t>08-02-2026</a:t>
             </a:fld>
             <a:endParaRPr lang="en-IN"/>
           </a:p>
@@ -1682,7 +1771,7 @@
           <a:p>
             <a:fld id="{80E1994F-3A96-4BFC-9935-A0F2A58A4CCE}" type="datetimeFigureOut">
               <a:rPr lang="en-IN" smtClean="0"/>
-              <a:t>05-02-2026</a:t>
+              <a:t>08-02-2026</a:t>
             </a:fld>
             <a:endParaRPr lang="en-IN"/>
           </a:p>
@@ -2097,7 +2186,7 @@
           <a:p>
             <a:fld id="{80E1994F-3A96-4BFC-9935-A0F2A58A4CCE}" type="datetimeFigureOut">
               <a:rPr lang="en-IN" smtClean="0"/>
-              <a:t>05-02-2026</a:t>
+              <a:t>08-02-2026</a:t>
             </a:fld>
             <a:endParaRPr lang="en-IN"/>
           </a:p>
@@ -2239,7 +2328,7 @@
           <a:p>
             <a:fld id="{80E1994F-3A96-4BFC-9935-A0F2A58A4CCE}" type="datetimeFigureOut">
               <a:rPr lang="en-IN" smtClean="0"/>
-              <a:t>05-02-2026</a:t>
+              <a:t>08-02-2026</a:t>
             </a:fld>
             <a:endParaRPr lang="en-IN"/>
           </a:p>
@@ -2352,7 +2441,7 @@
           <a:p>
             <a:fld id="{80E1994F-3A96-4BFC-9935-A0F2A58A4CCE}" type="datetimeFigureOut">
               <a:rPr lang="en-IN" smtClean="0"/>
-              <a:t>05-02-2026</a:t>
+              <a:t>08-02-2026</a:t>
             </a:fld>
             <a:endParaRPr lang="en-IN"/>
           </a:p>
@@ -2665,7 +2754,7 @@
           <a:p>
             <a:fld id="{80E1994F-3A96-4BFC-9935-A0F2A58A4CCE}" type="datetimeFigureOut">
               <a:rPr lang="en-IN" smtClean="0"/>
-              <a:t>05-02-2026</a:t>
+              <a:t>08-02-2026</a:t>
             </a:fld>
             <a:endParaRPr lang="en-IN"/>
           </a:p>
@@ -2954,7 +3043,7 @@
           <a:p>
             <a:fld id="{80E1994F-3A96-4BFC-9935-A0F2A58A4CCE}" type="datetimeFigureOut">
               <a:rPr lang="en-IN" smtClean="0"/>
-              <a:t>05-02-2026</a:t>
+              <a:t>08-02-2026</a:t>
             </a:fld>
             <a:endParaRPr lang="en-IN"/>
           </a:p>
@@ -3197,7 +3286,7 @@
           <a:p>
             <a:fld id="{80E1994F-3A96-4BFC-9935-A0F2A58A4CCE}" type="datetimeFigureOut">
               <a:rPr lang="en-IN" smtClean="0"/>
-              <a:t>05-02-2026</a:t>
+              <a:t>08-02-2026</a:t>
             </a:fld>
             <a:endParaRPr lang="en-IN"/>
           </a:p>
@@ -5238,6 +5327,666 @@
     <p:extLst>
       <p:ext uri="{BB962C8B-B14F-4D97-AF65-F5344CB8AC3E}">
         <p14:creationId xmlns:p14="http://schemas.microsoft.com/office/powerpoint/2010/main" val="1289078834"/>
+      </p:ext>
+    </p:extLst>
+  </p:cSld>
+  <p:clrMapOvr>
+    <a:masterClrMapping/>
+  </p:clrMapOvr>
+</p:sld>
+</file>
+
+<file path=ppt/slides/slide23.xml><?xml version="1.0" encoding="utf-8"?>
+<p:sld xmlns:a="http://schemas.openxmlformats.org/drawingml/2006/main" xmlns:r="http://schemas.openxmlformats.org/officeDocument/2006/relationships" xmlns:p="http://schemas.openxmlformats.org/presentationml/2006/main">
+  <p:cSld>
+    <p:spTree>
+      <p:nvGrpSpPr>
+        <p:cNvPr id="1" name=""/>
+        <p:cNvGrpSpPr/>
+        <p:nvPr/>
+      </p:nvGrpSpPr>
+      <p:grpSpPr>
+        <a:xfrm>
+          <a:off x="0" y="0"/>
+          <a:ext cx="0" cy="0"/>
+          <a:chOff x="0" y="0"/>
+          <a:chExt cx="0" cy="0"/>
+        </a:xfrm>
+      </p:grpSpPr>
+      <p:sp>
+        <p:nvSpPr>
+          <p:cNvPr id="2" name="Title 1">
+            <a:extLst>
+              <a:ext uri="{FF2B5EF4-FFF2-40B4-BE49-F238E27FC236}">
+                <a16:creationId xmlns:a16="http://schemas.microsoft.com/office/drawing/2014/main" id="{DC09D516-EC10-52EA-C59E-A67A4E09E9B2}"/>
+              </a:ext>
+            </a:extLst>
+          </p:cNvPr>
+          <p:cNvSpPr>
+            <a:spLocks noGrp="1"/>
+          </p:cNvSpPr>
+          <p:nvPr>
+            <p:ph type="title"/>
+          </p:nvPr>
+        </p:nvSpPr>
+        <p:spPr/>
+        <p:txBody>
+          <a:bodyPr/>
+          <a:lstStyle/>
+          <a:p>
+            <a:endParaRPr lang="en-IN"/>
+          </a:p>
+        </p:txBody>
+      </p:sp>
+      <p:sp>
+        <p:nvSpPr>
+          <p:cNvPr id="3" name="Content Placeholder 2">
+            <a:extLst>
+              <a:ext uri="{FF2B5EF4-FFF2-40B4-BE49-F238E27FC236}">
+                <a16:creationId xmlns:a16="http://schemas.microsoft.com/office/drawing/2014/main" id="{6AF6D5BE-BC61-093B-2A31-14FDAECF70B7}"/>
+              </a:ext>
+            </a:extLst>
+          </p:cNvPr>
+          <p:cNvSpPr>
+            <a:spLocks noGrp="1"/>
+          </p:cNvSpPr>
+          <p:nvPr>
+            <p:ph idx="1"/>
+          </p:nvPr>
+        </p:nvSpPr>
+        <p:spPr/>
+        <p:txBody>
+          <a:bodyPr/>
+          <a:lstStyle/>
+          <a:p>
+            <a:endParaRPr lang="en-IN"/>
+          </a:p>
+        </p:txBody>
+      </p:sp>
+      <p:pic>
+        <p:nvPicPr>
+          <p:cNvPr id="5" name="Picture 4">
+            <a:extLst>
+              <a:ext uri="{FF2B5EF4-FFF2-40B4-BE49-F238E27FC236}">
+                <a16:creationId xmlns:a16="http://schemas.microsoft.com/office/drawing/2014/main" id="{3B28C9F4-A437-6C15-9752-1D217D91DA70}"/>
+              </a:ext>
+            </a:extLst>
+          </p:cNvPr>
+          <p:cNvPicPr>
+            <a:picLocks noChangeAspect="1"/>
+          </p:cNvPicPr>
+          <p:nvPr/>
+        </p:nvPicPr>
+        <p:blipFill>
+          <a:blip r:embed="rId2"/>
+          <a:stretch>
+            <a:fillRect/>
+          </a:stretch>
+        </p:blipFill>
+        <p:spPr>
+          <a:xfrm>
+            <a:off x="0" y="69441"/>
+            <a:ext cx="12192000" cy="6719118"/>
+          </a:xfrm>
+          <a:prstGeom prst="rect">
+            <a:avLst/>
+          </a:prstGeom>
+        </p:spPr>
+      </p:pic>
+    </p:spTree>
+    <p:extLst>
+      <p:ext uri="{BB962C8B-B14F-4D97-AF65-F5344CB8AC3E}">
+        <p14:creationId xmlns:p14="http://schemas.microsoft.com/office/powerpoint/2010/main" val="1899831343"/>
+      </p:ext>
+    </p:extLst>
+  </p:cSld>
+  <p:clrMapOvr>
+    <a:masterClrMapping/>
+  </p:clrMapOvr>
+</p:sld>
+</file>
+
+<file path=ppt/slides/slide24.xml><?xml version="1.0" encoding="utf-8"?>
+<p:sld xmlns:a="http://schemas.openxmlformats.org/drawingml/2006/main" xmlns:r="http://schemas.openxmlformats.org/officeDocument/2006/relationships" xmlns:p="http://schemas.openxmlformats.org/presentationml/2006/main">
+  <p:cSld>
+    <p:spTree>
+      <p:nvGrpSpPr>
+        <p:cNvPr id="1" name=""/>
+        <p:cNvGrpSpPr/>
+        <p:nvPr/>
+      </p:nvGrpSpPr>
+      <p:grpSpPr>
+        <a:xfrm>
+          <a:off x="0" y="0"/>
+          <a:ext cx="0" cy="0"/>
+          <a:chOff x="0" y="0"/>
+          <a:chExt cx="0" cy="0"/>
+        </a:xfrm>
+      </p:grpSpPr>
+      <p:sp>
+        <p:nvSpPr>
+          <p:cNvPr id="2" name="Title 1">
+            <a:extLst>
+              <a:ext uri="{FF2B5EF4-FFF2-40B4-BE49-F238E27FC236}">
+                <a16:creationId xmlns:a16="http://schemas.microsoft.com/office/drawing/2014/main" id="{DC51977C-6FB5-D04B-7D41-16AEC0D6DD3D}"/>
+              </a:ext>
+            </a:extLst>
+          </p:cNvPr>
+          <p:cNvSpPr>
+            <a:spLocks noGrp="1"/>
+          </p:cNvSpPr>
+          <p:nvPr>
+            <p:ph type="title"/>
+          </p:nvPr>
+        </p:nvSpPr>
+        <p:spPr/>
+        <p:txBody>
+          <a:bodyPr/>
+          <a:lstStyle/>
+          <a:p>
+            <a:endParaRPr lang="en-IN"/>
+          </a:p>
+        </p:txBody>
+      </p:sp>
+      <p:sp>
+        <p:nvSpPr>
+          <p:cNvPr id="3" name="Content Placeholder 2">
+            <a:extLst>
+              <a:ext uri="{FF2B5EF4-FFF2-40B4-BE49-F238E27FC236}">
+                <a16:creationId xmlns:a16="http://schemas.microsoft.com/office/drawing/2014/main" id="{ECF78A81-C1FB-EA85-EE81-9BCEAC40E39E}"/>
+              </a:ext>
+            </a:extLst>
+          </p:cNvPr>
+          <p:cNvSpPr>
+            <a:spLocks noGrp="1"/>
+          </p:cNvSpPr>
+          <p:nvPr>
+            <p:ph idx="1"/>
+          </p:nvPr>
+        </p:nvSpPr>
+        <p:spPr/>
+        <p:txBody>
+          <a:bodyPr/>
+          <a:lstStyle/>
+          <a:p>
+            <a:endParaRPr lang="en-IN"/>
+          </a:p>
+        </p:txBody>
+      </p:sp>
+      <p:pic>
+        <p:nvPicPr>
+          <p:cNvPr id="5" name="Picture 4">
+            <a:extLst>
+              <a:ext uri="{FF2B5EF4-FFF2-40B4-BE49-F238E27FC236}">
+                <a16:creationId xmlns:a16="http://schemas.microsoft.com/office/drawing/2014/main" id="{685DEE11-1891-5846-64B9-D96D4DE9A588}"/>
+              </a:ext>
+            </a:extLst>
+          </p:cNvPr>
+          <p:cNvPicPr>
+            <a:picLocks noChangeAspect="1"/>
+          </p:cNvPicPr>
+          <p:nvPr/>
+        </p:nvPicPr>
+        <p:blipFill>
+          <a:blip r:embed="rId2"/>
+          <a:stretch>
+            <a:fillRect/>
+          </a:stretch>
+        </p:blipFill>
+        <p:spPr>
+          <a:xfrm>
+            <a:off x="0" y="98263"/>
+            <a:ext cx="12192000" cy="6661474"/>
+          </a:xfrm>
+          <a:prstGeom prst="rect">
+            <a:avLst/>
+          </a:prstGeom>
+        </p:spPr>
+      </p:pic>
+    </p:spTree>
+    <p:extLst>
+      <p:ext uri="{BB962C8B-B14F-4D97-AF65-F5344CB8AC3E}">
+        <p14:creationId xmlns:p14="http://schemas.microsoft.com/office/powerpoint/2010/main" val="1182341619"/>
+      </p:ext>
+    </p:extLst>
+  </p:cSld>
+  <p:clrMapOvr>
+    <a:masterClrMapping/>
+  </p:clrMapOvr>
+</p:sld>
+</file>
+
+<file path=ppt/slides/slide25.xml><?xml version="1.0" encoding="utf-8"?>
+<p:sld xmlns:a="http://schemas.openxmlformats.org/drawingml/2006/main" xmlns:r="http://schemas.openxmlformats.org/officeDocument/2006/relationships" xmlns:p="http://schemas.openxmlformats.org/presentationml/2006/main">
+  <p:cSld>
+    <p:spTree>
+      <p:nvGrpSpPr>
+        <p:cNvPr id="1" name=""/>
+        <p:cNvGrpSpPr/>
+        <p:nvPr/>
+      </p:nvGrpSpPr>
+      <p:grpSpPr>
+        <a:xfrm>
+          <a:off x="0" y="0"/>
+          <a:ext cx="0" cy="0"/>
+          <a:chOff x="0" y="0"/>
+          <a:chExt cx="0" cy="0"/>
+        </a:xfrm>
+      </p:grpSpPr>
+      <p:sp>
+        <p:nvSpPr>
+          <p:cNvPr id="2" name="Title 1">
+            <a:extLst>
+              <a:ext uri="{FF2B5EF4-FFF2-40B4-BE49-F238E27FC236}">
+                <a16:creationId xmlns:a16="http://schemas.microsoft.com/office/drawing/2014/main" id="{8E93ECB6-1ED1-11DA-F7C1-6E5CE850929B}"/>
+              </a:ext>
+            </a:extLst>
+          </p:cNvPr>
+          <p:cNvSpPr>
+            <a:spLocks noGrp="1"/>
+          </p:cNvSpPr>
+          <p:nvPr>
+            <p:ph type="title"/>
+          </p:nvPr>
+        </p:nvSpPr>
+        <p:spPr/>
+        <p:txBody>
+          <a:bodyPr/>
+          <a:lstStyle/>
+          <a:p>
+            <a:endParaRPr lang="en-IN"/>
+          </a:p>
+        </p:txBody>
+      </p:sp>
+      <p:sp>
+        <p:nvSpPr>
+          <p:cNvPr id="3" name="Content Placeholder 2">
+            <a:extLst>
+              <a:ext uri="{FF2B5EF4-FFF2-40B4-BE49-F238E27FC236}">
+                <a16:creationId xmlns:a16="http://schemas.microsoft.com/office/drawing/2014/main" id="{04BA1E7B-F301-C531-0E7B-272E46C6E38D}"/>
+              </a:ext>
+            </a:extLst>
+          </p:cNvPr>
+          <p:cNvSpPr>
+            <a:spLocks noGrp="1"/>
+          </p:cNvSpPr>
+          <p:nvPr>
+            <p:ph idx="1"/>
+          </p:nvPr>
+        </p:nvSpPr>
+        <p:spPr/>
+        <p:txBody>
+          <a:bodyPr/>
+          <a:lstStyle/>
+          <a:p>
+            <a:endParaRPr lang="en-IN"/>
+          </a:p>
+        </p:txBody>
+      </p:sp>
+      <p:pic>
+        <p:nvPicPr>
+          <p:cNvPr id="5" name="Picture 4">
+            <a:extLst>
+              <a:ext uri="{FF2B5EF4-FFF2-40B4-BE49-F238E27FC236}">
+                <a16:creationId xmlns:a16="http://schemas.microsoft.com/office/drawing/2014/main" id="{21859AFF-E334-55BA-6765-CEF2C995AD00}"/>
+              </a:ext>
+            </a:extLst>
+          </p:cNvPr>
+          <p:cNvPicPr>
+            <a:picLocks noChangeAspect="1"/>
+          </p:cNvPicPr>
+          <p:nvPr/>
+        </p:nvPicPr>
+        <p:blipFill>
+          <a:blip r:embed="rId2"/>
+          <a:stretch>
+            <a:fillRect/>
+          </a:stretch>
+        </p:blipFill>
+        <p:spPr>
+          <a:xfrm>
+            <a:off x="2982" y="0"/>
+            <a:ext cx="12186035" cy="6858000"/>
+          </a:xfrm>
+          <a:prstGeom prst="rect">
+            <a:avLst/>
+          </a:prstGeom>
+        </p:spPr>
+      </p:pic>
+    </p:spTree>
+    <p:extLst>
+      <p:ext uri="{BB962C8B-B14F-4D97-AF65-F5344CB8AC3E}">
+        <p14:creationId xmlns:p14="http://schemas.microsoft.com/office/powerpoint/2010/main" val="1938700212"/>
+      </p:ext>
+    </p:extLst>
+  </p:cSld>
+  <p:clrMapOvr>
+    <a:masterClrMapping/>
+  </p:clrMapOvr>
+</p:sld>
+</file>
+
+<file path=ppt/slides/slide26.xml><?xml version="1.0" encoding="utf-8"?>
+<p:sld xmlns:a="http://schemas.openxmlformats.org/drawingml/2006/main" xmlns:r="http://schemas.openxmlformats.org/officeDocument/2006/relationships" xmlns:p="http://schemas.openxmlformats.org/presentationml/2006/main">
+  <p:cSld>
+    <p:spTree>
+      <p:nvGrpSpPr>
+        <p:cNvPr id="1" name=""/>
+        <p:cNvGrpSpPr/>
+        <p:nvPr/>
+      </p:nvGrpSpPr>
+      <p:grpSpPr>
+        <a:xfrm>
+          <a:off x="0" y="0"/>
+          <a:ext cx="0" cy="0"/>
+          <a:chOff x="0" y="0"/>
+          <a:chExt cx="0" cy="0"/>
+        </a:xfrm>
+      </p:grpSpPr>
+      <p:sp>
+        <p:nvSpPr>
+          <p:cNvPr id="2" name="Title 1">
+            <a:extLst>
+              <a:ext uri="{FF2B5EF4-FFF2-40B4-BE49-F238E27FC236}">
+                <a16:creationId xmlns:a16="http://schemas.microsoft.com/office/drawing/2014/main" id="{C691C203-F7EF-5AED-2ED0-27E61892E69A}"/>
+              </a:ext>
+            </a:extLst>
+          </p:cNvPr>
+          <p:cNvSpPr>
+            <a:spLocks noGrp="1"/>
+          </p:cNvSpPr>
+          <p:nvPr>
+            <p:ph type="title"/>
+          </p:nvPr>
+        </p:nvSpPr>
+        <p:spPr/>
+        <p:txBody>
+          <a:bodyPr/>
+          <a:lstStyle/>
+          <a:p>
+            <a:endParaRPr lang="en-IN"/>
+          </a:p>
+        </p:txBody>
+      </p:sp>
+      <p:sp>
+        <p:nvSpPr>
+          <p:cNvPr id="3" name="Content Placeholder 2">
+            <a:extLst>
+              <a:ext uri="{FF2B5EF4-FFF2-40B4-BE49-F238E27FC236}">
+                <a16:creationId xmlns:a16="http://schemas.microsoft.com/office/drawing/2014/main" id="{41815568-4C90-245F-B340-1A36F958FACD}"/>
+              </a:ext>
+            </a:extLst>
+          </p:cNvPr>
+          <p:cNvSpPr>
+            <a:spLocks noGrp="1"/>
+          </p:cNvSpPr>
+          <p:nvPr>
+            <p:ph idx="1"/>
+          </p:nvPr>
+        </p:nvSpPr>
+        <p:spPr/>
+        <p:txBody>
+          <a:bodyPr/>
+          <a:lstStyle/>
+          <a:p>
+            <a:endParaRPr lang="en-IN"/>
+          </a:p>
+        </p:txBody>
+      </p:sp>
+      <p:pic>
+        <p:nvPicPr>
+          <p:cNvPr id="5" name="Picture 4">
+            <a:extLst>
+              <a:ext uri="{FF2B5EF4-FFF2-40B4-BE49-F238E27FC236}">
+                <a16:creationId xmlns:a16="http://schemas.microsoft.com/office/drawing/2014/main" id="{96FF3784-3336-8589-35EC-296669B344C3}"/>
+              </a:ext>
+            </a:extLst>
+          </p:cNvPr>
+          <p:cNvPicPr>
+            <a:picLocks noChangeAspect="1"/>
+          </p:cNvPicPr>
+          <p:nvPr/>
+        </p:nvPicPr>
+        <p:blipFill>
+          <a:blip r:embed="rId2"/>
+          <a:stretch>
+            <a:fillRect/>
+          </a:stretch>
+        </p:blipFill>
+        <p:spPr>
+          <a:xfrm>
+            <a:off x="0" y="908501"/>
+            <a:ext cx="12192000" cy="5040997"/>
+          </a:xfrm>
+          <a:prstGeom prst="rect">
+            <a:avLst/>
+          </a:prstGeom>
+        </p:spPr>
+      </p:pic>
+    </p:spTree>
+    <p:extLst>
+      <p:ext uri="{BB962C8B-B14F-4D97-AF65-F5344CB8AC3E}">
+        <p14:creationId xmlns:p14="http://schemas.microsoft.com/office/powerpoint/2010/main" val="1595278338"/>
+      </p:ext>
+    </p:extLst>
+  </p:cSld>
+  <p:clrMapOvr>
+    <a:masterClrMapping/>
+  </p:clrMapOvr>
+</p:sld>
+</file>
+
+<file path=ppt/slides/slide27.xml><?xml version="1.0" encoding="utf-8"?>
+<p:sld xmlns:a="http://schemas.openxmlformats.org/drawingml/2006/main" xmlns:r="http://schemas.openxmlformats.org/officeDocument/2006/relationships" xmlns:p="http://schemas.openxmlformats.org/presentationml/2006/main">
+  <p:cSld>
+    <p:spTree>
+      <p:nvGrpSpPr>
+        <p:cNvPr id="1" name=""/>
+        <p:cNvGrpSpPr/>
+        <p:nvPr/>
+      </p:nvGrpSpPr>
+      <p:grpSpPr>
+        <a:xfrm>
+          <a:off x="0" y="0"/>
+          <a:ext cx="0" cy="0"/>
+          <a:chOff x="0" y="0"/>
+          <a:chExt cx="0" cy="0"/>
+        </a:xfrm>
+      </p:grpSpPr>
+      <p:sp>
+        <p:nvSpPr>
+          <p:cNvPr id="2" name="Title 1">
+            <a:extLst>
+              <a:ext uri="{FF2B5EF4-FFF2-40B4-BE49-F238E27FC236}">
+                <a16:creationId xmlns:a16="http://schemas.microsoft.com/office/drawing/2014/main" id="{A2423F66-7A1C-A580-E46F-3CACB01C8D7B}"/>
+              </a:ext>
+            </a:extLst>
+          </p:cNvPr>
+          <p:cNvSpPr>
+            <a:spLocks noGrp="1"/>
+          </p:cNvSpPr>
+          <p:nvPr>
+            <p:ph type="title"/>
+          </p:nvPr>
+        </p:nvSpPr>
+        <p:spPr/>
+        <p:txBody>
+          <a:bodyPr/>
+          <a:lstStyle/>
+          <a:p>
+            <a:endParaRPr lang="en-IN"/>
+          </a:p>
+        </p:txBody>
+      </p:sp>
+      <p:sp>
+        <p:nvSpPr>
+          <p:cNvPr id="3" name="Content Placeholder 2">
+            <a:extLst>
+              <a:ext uri="{FF2B5EF4-FFF2-40B4-BE49-F238E27FC236}">
+                <a16:creationId xmlns:a16="http://schemas.microsoft.com/office/drawing/2014/main" id="{7AAEE880-99E2-1D99-1D34-C67D9A592921}"/>
+              </a:ext>
+            </a:extLst>
+          </p:cNvPr>
+          <p:cNvSpPr>
+            <a:spLocks noGrp="1"/>
+          </p:cNvSpPr>
+          <p:nvPr>
+            <p:ph idx="1"/>
+          </p:nvPr>
+        </p:nvSpPr>
+        <p:spPr/>
+        <p:txBody>
+          <a:bodyPr/>
+          <a:lstStyle/>
+          <a:p>
+            <a:endParaRPr lang="en-IN"/>
+          </a:p>
+        </p:txBody>
+      </p:sp>
+      <p:pic>
+        <p:nvPicPr>
+          <p:cNvPr id="5" name="Picture 4">
+            <a:extLst>
+              <a:ext uri="{FF2B5EF4-FFF2-40B4-BE49-F238E27FC236}">
+                <a16:creationId xmlns:a16="http://schemas.microsoft.com/office/drawing/2014/main" id="{04675D54-393E-4C90-8132-B4F837CEE379}"/>
+              </a:ext>
+            </a:extLst>
+          </p:cNvPr>
+          <p:cNvPicPr>
+            <a:picLocks noChangeAspect="1"/>
+          </p:cNvPicPr>
+          <p:nvPr/>
+        </p:nvPicPr>
+        <p:blipFill>
+          <a:blip r:embed="rId2"/>
+          <a:stretch>
+            <a:fillRect/>
+          </a:stretch>
+        </p:blipFill>
+        <p:spPr>
+          <a:xfrm>
+            <a:off x="0" y="876780"/>
+            <a:ext cx="12192000" cy="5104440"/>
+          </a:xfrm>
+          <a:prstGeom prst="rect">
+            <a:avLst/>
+          </a:prstGeom>
+        </p:spPr>
+      </p:pic>
+    </p:spTree>
+    <p:extLst>
+      <p:ext uri="{BB962C8B-B14F-4D97-AF65-F5344CB8AC3E}">
+        <p14:creationId xmlns:p14="http://schemas.microsoft.com/office/powerpoint/2010/main" val="218769065"/>
+      </p:ext>
+    </p:extLst>
+  </p:cSld>
+  <p:clrMapOvr>
+    <a:masterClrMapping/>
+  </p:clrMapOvr>
+</p:sld>
+</file>
+
+<file path=ppt/slides/slide28.xml><?xml version="1.0" encoding="utf-8"?>
+<p:sld xmlns:a="http://schemas.openxmlformats.org/drawingml/2006/main" xmlns:r="http://schemas.openxmlformats.org/officeDocument/2006/relationships" xmlns:p="http://schemas.openxmlformats.org/presentationml/2006/main">
+  <p:cSld>
+    <p:spTree>
+      <p:nvGrpSpPr>
+        <p:cNvPr id="1" name=""/>
+        <p:cNvGrpSpPr/>
+        <p:nvPr/>
+      </p:nvGrpSpPr>
+      <p:grpSpPr>
+        <a:xfrm>
+          <a:off x="0" y="0"/>
+          <a:ext cx="0" cy="0"/>
+          <a:chOff x="0" y="0"/>
+          <a:chExt cx="0" cy="0"/>
+        </a:xfrm>
+      </p:grpSpPr>
+      <p:sp>
+        <p:nvSpPr>
+          <p:cNvPr id="2" name="Title 1">
+            <a:extLst>
+              <a:ext uri="{FF2B5EF4-FFF2-40B4-BE49-F238E27FC236}">
+                <a16:creationId xmlns:a16="http://schemas.microsoft.com/office/drawing/2014/main" id="{E54E5708-7287-46EE-EEA9-2B75C5648027}"/>
+              </a:ext>
+            </a:extLst>
+          </p:cNvPr>
+          <p:cNvSpPr>
+            <a:spLocks noGrp="1"/>
+          </p:cNvSpPr>
+          <p:nvPr>
+            <p:ph type="title"/>
+          </p:nvPr>
+        </p:nvSpPr>
+        <p:spPr/>
+        <p:txBody>
+          <a:bodyPr/>
+          <a:lstStyle/>
+          <a:p>
+            <a:endParaRPr lang="en-IN"/>
+          </a:p>
+        </p:txBody>
+      </p:sp>
+      <p:sp>
+        <p:nvSpPr>
+          <p:cNvPr id="3" name="Content Placeholder 2">
+            <a:extLst>
+              <a:ext uri="{FF2B5EF4-FFF2-40B4-BE49-F238E27FC236}">
+                <a16:creationId xmlns:a16="http://schemas.microsoft.com/office/drawing/2014/main" id="{5AAD9144-4553-7299-DEC0-66D871410AE2}"/>
+              </a:ext>
+            </a:extLst>
+          </p:cNvPr>
+          <p:cNvSpPr>
+            <a:spLocks noGrp="1"/>
+          </p:cNvSpPr>
+          <p:nvPr>
+            <p:ph idx="1"/>
+          </p:nvPr>
+        </p:nvSpPr>
+        <p:spPr/>
+        <p:txBody>
+          <a:bodyPr/>
+          <a:lstStyle/>
+          <a:p>
+            <a:endParaRPr lang="en-IN"/>
+          </a:p>
+        </p:txBody>
+      </p:sp>
+      <p:pic>
+        <p:nvPicPr>
+          <p:cNvPr id="5" name="Picture 4">
+            <a:extLst>
+              <a:ext uri="{FF2B5EF4-FFF2-40B4-BE49-F238E27FC236}">
+                <a16:creationId xmlns:a16="http://schemas.microsoft.com/office/drawing/2014/main" id="{F22616FF-09D7-F918-3C20-4772750140E4}"/>
+              </a:ext>
+            </a:extLst>
+          </p:cNvPr>
+          <p:cNvPicPr>
+            <a:picLocks noChangeAspect="1"/>
+          </p:cNvPicPr>
+          <p:nvPr/>
+        </p:nvPicPr>
+        <p:blipFill>
+          <a:blip r:embed="rId2"/>
+          <a:stretch>
+            <a:fillRect/>
+          </a:stretch>
+        </p:blipFill>
+        <p:spPr>
+          <a:xfrm>
+            <a:off x="0" y="968165"/>
+            <a:ext cx="12192000" cy="4921670"/>
+          </a:xfrm>
+          <a:prstGeom prst="rect">
+            <a:avLst/>
+          </a:prstGeom>
+        </p:spPr>
+      </p:pic>
+    </p:spTree>
+    <p:extLst>
+      <p:ext uri="{BB962C8B-B14F-4D97-AF65-F5344CB8AC3E}">
+        <p14:creationId xmlns:p14="http://schemas.microsoft.com/office/powerpoint/2010/main" val="3289320709"/>
       </p:ext>
     </p:extLst>
   </p:cSld>
